--- a/lecons/F5/40_F5_M3_L35_Rapid_Population_Growth_in_Least_Industrialised_Countries.pptx
+++ b/lecons/F5/40_F5_M3_L35_Rapid_Population_Growth_in_Least_Industrialised_Countries.pptx
@@ -12935,7 +12935,7 @@
               <a:buNone/>
             </a:pPr>
             <a:r>
-              <a:rPr lang="en-US" sz="4000" b="1" dirty="0">
+              <a:rPr lang="en-US" sz="3200" b="1" dirty="0">
                 <a:solidFill>
                   <a:srgbClr val="111111"/>
                 </a:solidFill>
@@ -12945,7 +12945,7 @@
               </a:rPr>
               <a:t>Topic: The Dynamics of Population and Implications</a:t>
             </a:r>
-            <a:endParaRPr lang="en-US" sz="4000" dirty="0"/>
+            <a:endParaRPr lang="en-US" sz="3200" dirty="0"/>
           </a:p>
           <a:p>
             <a:pPr algn="l" indent="0" marL="0">
@@ -12955,7 +12955,7 @@
               <a:buNone/>
             </a:pPr>
             <a:r>
-              <a:rPr lang="en-US" sz="4000" b="1" dirty="0">
+              <a:rPr lang="en-US" sz="3200" b="1" dirty="0">
                 <a:solidFill>
                   <a:srgbClr val="111111"/>
                 </a:solidFill>
@@ -12965,7 +12965,7 @@
               </a:rPr>
               <a:t>Sub-topic: Population Change in Time (Population Growth)</a:t>
             </a:r>
-            <a:endParaRPr lang="en-US" sz="4000" dirty="0"/>
+            <a:endParaRPr lang="en-US" sz="3200" dirty="0"/>
           </a:p>
           <a:p>
             <a:pPr algn="l" indent="0" marL="0">
@@ -12975,7 +12975,7 @@
               <a:buNone/>
             </a:pPr>
             <a:r>
-              <a:rPr lang="en-US" sz="4000" b="1" dirty="0">
+              <a:rPr lang="en-US" sz="3200" b="1" dirty="0">
                 <a:solidFill>
                   <a:srgbClr val="990011"/>
                 </a:solidFill>
@@ -12985,7 +12985,7 @@
               </a:rPr>
               <a:t>Lesson 35: Rapid Population Growth in Least Industrialised Countries</a:t>
             </a:r>
-            <a:endParaRPr lang="en-US" sz="4000" dirty="0"/>
+            <a:endParaRPr lang="en-US" sz="3200" dirty="0"/>
           </a:p>
         </p:txBody>
       </p:sp>

--- a/lecons/F5/40_F5_M3_L35_Rapid_Population_Growth_in_Least_Industrialised_Countries.pptx
+++ b/lecons/F5/40_F5_M3_L35_Rapid_Population_Growth_in_Least_Industrialised_Countries.pptx
@@ -55,9 +55,10 @@
     <p:sldId id="303" r:id="rId49"/>
     <p:sldId id="304" r:id="rId50"/>
     <p:sldId id="305" r:id="rId51"/>
+    <p:sldId id="306" r:id="rId52"/>
   </p:sldIdLst>
   <p:notesMasterIdLst>
-    <p:notesMasterId r:id="rId52"/>
+    <p:notesMasterId r:id="rId53"/>
   </p:notesMasterIdLst>
   <p:sldSz cx="12192000" cy="6858000"/>
   <p:notesSz cx="6858000" cy="12192000"/>
@@ -3103,7 +3104,7 @@
           <a:p>
             <a:r>
               <a:rPr lang="en-US" dirty="0"/>
-              <a:t>Let us copy Implications. Rapid population growth has the following implications. On this slide we have Social and Economic. Write each point on a new line, with the key term first, and explain it in your own words when we revise. When you finish, we go to the next slide.</a:t>
+              <a:t>Let us copy Negative Implications. Rapid population growth has the following negative implications. On this slide we have Social and Economic. Write each point on a new line, with the key term first, and explain it in your own words when we revise. When you finish, we go to the next slide.</a:t>
             </a:r>
             <a:endParaRPr lang="en-US" dirty="0"/>
           </a:p>
@@ -3191,7 +3192,7 @@
           <a:p>
             <a:r>
               <a:rPr lang="en-US" dirty="0"/>
-              <a:t>We continue with Implications. On this slide we have Environmental and Positive. Write each point on a new line, with the key term first, and explain it in your own words when we revise.</a:t>
+              <a:t>We continue with Negative Implications. On this slide we have Environmental. Write each point on a new line, with the key term first, and explain it in your own words when we revise.</a:t>
             </a:r>
             <a:endParaRPr lang="en-US" dirty="0"/>
           </a:p>
@@ -3279,7 +3280,7 @@
           <a:p>
             <a:r>
               <a:rPr lang="en-US" dirty="0"/>
-              <a:t>Now draw this illustration in your notebook: a youthful population. Give it a title and label it clearly.</a:t>
+              <a:t>Let us copy Positive Implications. Rapid population growth has the following positive implications. On this slide we have Labour and A big market. Write each point on a new line, with the key term first, and explain it in your own words when we revise.</a:t>
             </a:r>
             <a:endParaRPr lang="en-US" dirty="0"/>
           </a:p>
@@ -3367,7 +3368,7 @@
           <a:p>
             <a:r>
               <a:rPr lang="en-US" dirty="0"/>
-              <a:t>Now let us check what you have understood. Question 1: Give two reasons for rapid population growth in LICs. Answer in your exercise book.</a:t>
+              <a:t>Now draw this illustration in your notebook: a youthful population. Give it a title and label it clearly.</a:t>
             </a:r>
             <a:endParaRPr lang="en-US" dirty="0"/>
           </a:p>
@@ -3543,7 +3544,7 @@
           <a:p>
             <a:r>
               <a:rPr lang="en-US" dirty="0"/>
-              <a:t>The expected answer is: early marriages and falling death rates. If you got it right, well done.</a:t>
+              <a:t>Now let us check what you have understood. Question 1: Give two reasons for rapid population growth in LICs. Answer in your exercise book.</a:t>
             </a:r>
             <a:endParaRPr lang="en-US" dirty="0"/>
           </a:p>
@@ -3631,7 +3632,7 @@
           <a:p>
             <a:r>
               <a:rPr lang="en-US" dirty="0"/>
-              <a:t>Now let us check what you have understood. Question 2: Give two implications. Answer in your exercise book.</a:t>
+              <a:t>The expected answer is: early marriages and falling death rates. If you got it right, well done.</a:t>
             </a:r>
             <a:endParaRPr lang="en-US" dirty="0"/>
           </a:p>
@@ -3719,7 +3720,7 @@
           <a:p>
             <a:r>
               <a:rPr lang="en-US" dirty="0"/>
-              <a:t>The expected answer is: unemployment and overcrowded schools. If you got it right, well done.</a:t>
+              <a:t>Now let us check what you have understood. Question 2: Give two implications. Answer in your exercise book.</a:t>
             </a:r>
             <a:endParaRPr lang="en-US" dirty="0"/>
           </a:p>
@@ -3807,7 +3808,7 @@
           <a:p>
             <a:r>
               <a:rPr lang="en-US" dirty="0"/>
-              <a:t>For those who need more practice, fill in the blanks in your exercise book. The answers are: number 1, early; number 2, birth; number 3, unemployment.</a:t>
+              <a:t>The expected answer is: unemployment and overcrowded schools. If you got it right, well done.</a:t>
             </a:r>
             <a:endParaRPr lang="en-US" dirty="0"/>
           </a:p>
@@ -3895,7 +3896,7 @@
           <a:p>
             <a:r>
               <a:rPr lang="en-US" dirty="0"/>
-              <a:t>For your homework: Explain three ways rapid population growth affects your town. We shall correct it at the beginning of our next lesson.</a:t>
+              <a:t>For those who need more practice, fill in the blanks in your exercise book. The answers are: number 1, early; number 2, birth; number 3, unemployment.</a:t>
             </a:r>
             <a:endParaRPr lang="en-US" dirty="0"/>
           </a:p>
@@ -3983,7 +3984,7 @@
           <a:p>
             <a:r>
               <a:rPr lang="en-US" dirty="0"/>
-              <a:t>Our next lesson will be on Further Study 4: Control of Population Growth. Thank you for your attention, and see you next time.</a:t>
+              <a:t>For your homework: Explain three ways rapid population growth affects your town. We shall correct it at the beginning of our next lesson.</a:t>
             </a:r>
             <a:endParaRPr lang="en-US" dirty="0"/>
           </a:p>
@@ -4071,7 +4072,7 @@
           <a:p>
             <a:r>
               <a:rPr lang="en-US" dirty="0"/>
-              <a:t>Let us play the bilingual game. I say a word in English, and you give me the French word. Then we do the reverse.</a:t>
+              <a:t>Our next lesson will be on Further Study 4: Control of Population Growth. Thank you for your attention, and see you next time.</a:t>
             </a:r>
             <a:endParaRPr lang="en-US" dirty="0"/>
           </a:p>
@@ -4159,7 +4160,7 @@
           <a:p>
             <a:r>
               <a:rPr lang="en-US" dirty="0"/>
-              <a:t>I record this information in the official logbook of the class after the lesson.</a:t>
+              <a:t>Let us play the bilingual game. I say a word in English, and you give me the French word. Then we do the reverse.</a:t>
             </a:r>
             <a:endParaRPr lang="en-US" dirty="0"/>
           </a:p>
@@ -4247,7 +4248,7 @@
           <a:p>
             <a:r>
               <a:rPr lang="en-US" dirty="0"/>
-              <a:t>I complete the second page of the logbook: the matter taught, the evaluation, the homework and the attendance.</a:t>
+              <a:t>I record this information in the official logbook of the class after the lesson.</a:t>
             </a:r>
             <a:endParaRPr lang="en-US" dirty="0"/>
           </a:p>
@@ -4335,7 +4336,7 @@
           <a:p>
             <a:r>
               <a:rPr lang="en-US" dirty="0"/>
-              <a:t>This slide is for me, the teacher: it gives the timing of the lesson and what to do if the projector is not available.</a:t>
+              <a:t>I complete the second page of the logbook: the matter taught, the evaluation, the homework and the attendance.</a:t>
             </a:r>
             <a:endParaRPr lang="en-US" dirty="0"/>
           </a:p>
@@ -4511,7 +4512,7 @@
           <a:p>
             <a:r>
               <a:rPr lang="en-US" dirty="0"/>
-              <a:t>These are the references and picture credits used to prepare this lesson.</a:t>
+              <a:t>This slide is for me, the teacher: it gives the timing of the lesson and what to do if the projector is not available.</a:t>
             </a:r>
             <a:endParaRPr lang="en-US" dirty="0"/>
           </a:p>
@@ -4535,6 +4536,94 @@
             <a:fld id="{F7021451-1387-4CA6-816F-3879F97B5CBC}" type="slidenum">
               <a:rPr lang="en-US"/>
               <a:t>50</a:t>
+            </a:fld>
+            <a:endParaRPr lang="en-US"/>
+          </a:p>
+        </p:txBody>
+      </p:sp>
+    </p:spTree>
+    <p:extLst>
+      <p:ext uri="{BB962C8B-B14F-4D97-AF65-F5344CB8AC3E}">
+        <p14:creationId xmlns:p14="http://schemas.microsoft.com/office/powerpoint/2010/main" val="1024086991"/>
+      </p:ext>
+    </p:extLst>
+  </p:cSld>
+  <p:clrMapOvr>
+    <a:masterClrMapping/>
+  </p:clrMapOvr>
+</p:notes>
+</file>
+
+<file path=ppt/notesSlides/notesSlide51.xml><?xml version="1.0" encoding="utf-8"?>
+<p:notes xmlns:a="http://schemas.openxmlformats.org/drawingml/2006/main" xmlns:r="http://schemas.openxmlformats.org/officeDocument/2006/relationships" xmlns:p="http://schemas.openxmlformats.org/presentationml/2006/main">
+  <p:cSld>
+    <p:spTree>
+      <p:nvGrpSpPr>
+        <p:cNvPr id="1" name=""/>
+        <p:cNvGrpSpPr/>
+        <p:nvPr/>
+      </p:nvGrpSpPr>
+      <p:grpSpPr>
+        <a:xfrm>
+          <a:off x="0" y="0"/>
+          <a:ext cx="0" cy="0"/>
+          <a:chOff x="0" y="0"/>
+          <a:chExt cx="0" cy="0"/>
+        </a:xfrm>
+      </p:grpSpPr>
+      <p:sp>
+        <p:nvSpPr>
+          <p:cNvPr id="2" name="Slide Image Placeholder 1"/>
+          <p:cNvSpPr>
+            <a:spLocks noGrp="1" noRot="1" noChangeAspect="1"/>
+          </p:cNvSpPr>
+          <p:nvPr>
+            <p:ph type="sldImg"/>
+          </p:nvPr>
+        </p:nvSpPr>
+        <p:spPr/>
+      </p:sp>
+      <p:sp>
+        <p:nvSpPr>
+          <p:cNvPr id="3" name="Notes Placeholder 2"/>
+          <p:cNvSpPr>
+            <a:spLocks noGrp="1"/>
+          </p:cNvSpPr>
+          <p:nvPr>
+            <p:ph type="body" idx="1"/>
+          </p:nvPr>
+        </p:nvSpPr>
+        <p:spPr/>
+        <p:txBody>
+          <a:bodyPr/>
+          <a:lstStyle/>
+          <a:p>
+            <a:r>
+              <a:rPr lang="en-US" dirty="0"/>
+              <a:t>These are the references and picture credits used to prepare this lesson.</a:t>
+            </a:r>
+            <a:endParaRPr lang="en-US" dirty="0"/>
+          </a:p>
+        </p:txBody>
+      </p:sp>
+      <p:sp>
+        <p:nvSpPr>
+          <p:cNvPr id="4" name="Slide Number Placeholder 3"/>
+          <p:cNvSpPr>
+            <a:spLocks noGrp="1"/>
+          </p:cNvSpPr>
+          <p:nvPr>
+            <p:ph type="sldNum" sz="quarter" idx="10"/>
+          </p:nvPr>
+        </p:nvSpPr>
+        <p:spPr/>
+        <p:txBody>
+          <a:bodyPr/>
+          <a:lstStyle/>
+          <a:p>
+            <a:fld id="{F7021451-1387-4CA6-816F-3879F97B5CBC}" type="slidenum">
+              <a:rPr lang="en-US"/>
+              <a:t>51</a:t>
             </a:fld>
             <a:endParaRPr lang="en-US"/>
           </a:p>
@@ -13703,8 +13792,47 @@
         </p:nvSpPr>
         <p:spPr>
           <a:xfrm>
-            <a:off x="4069080" y="1783080"/>
-            <a:ext cx="7802575" cy="4663440"/>
+            <a:off x="4069080" y="1737360"/>
+            <a:ext cx="7802575" cy="457200"/>
+          </a:xfrm>
+          <a:prstGeom prst="rect">
+            <a:avLst/>
+          </a:prstGeom>
+          <a:noFill/>
+          <a:ln/>
+        </p:spPr>
+        <p:txBody>
+          <a:bodyPr wrap="square" lIns="0" tIns="0" rIns="0" bIns="0" rtlCol="0" anchor="ctr"/>
+          <a:lstStyle/>
+          <a:p>
+            <a:pPr algn="l" indent="0" marL="0">
+              <a:buNone/>
+            </a:pPr>
+            <a:r>
+              <a:rPr lang="en-US" sz="3200" b="1" dirty="0">
+                <a:solidFill>
+                  <a:srgbClr val="990011"/>
+                </a:solidFill>
+                <a:latin typeface="Times New Roman" pitchFamily="34" charset="0"/>
+                <a:ea typeface="Times New Roman" pitchFamily="34" charset="-122"/>
+                <a:cs typeface="Times New Roman" pitchFamily="34" charset="-120"/>
+              </a:rPr>
+              <a:t>A) Negative Implications</a:t>
+            </a:r>
+            <a:endParaRPr lang="en-US" sz="3200" dirty="0"/>
+          </a:p>
+        </p:txBody>
+      </p:sp>
+      <p:sp>
+        <p:nvSpPr>
+          <p:cNvPr id="6" name="Text 3"/>
+          <p:cNvSpPr/>
+          <p:nvPr/>
+        </p:nvSpPr>
+        <p:spPr>
+          <a:xfrm>
+            <a:off x="4069080" y="2240280"/>
+            <a:ext cx="7802575" cy="4206240"/>
           </a:xfrm>
           <a:prstGeom prst="rect">
             <a:avLst/>
@@ -13731,7 +13859,7 @@
                 <a:ea typeface="Times New Roman" pitchFamily="34" charset="-122"/>
                 <a:cs typeface="Times New Roman" pitchFamily="34" charset="-120"/>
               </a:rPr>
-              <a:t>Rapid population growth has the following implications:</a:t>
+              <a:t>Rapid population growth has the following negative implications:</a:t>
             </a:r>
             <a:endParaRPr lang="en-US" sz="4000" dirty="0"/>
           </a:p>
@@ -13982,7 +14110,7 @@
                 <a:ea typeface="Times New Roman" pitchFamily="34" charset="-122"/>
                 <a:cs typeface="Times New Roman" pitchFamily="34" charset="-120"/>
               </a:rPr>
-              <a:t>2. Implications (continued)</a:t>
+              <a:t>2. Implications</a:t>
             </a:r>
             <a:endParaRPr lang="en-US" sz="3600" dirty="0"/>
           </a:p>
@@ -13996,8 +14124,47 @@
         </p:nvSpPr>
         <p:spPr>
           <a:xfrm>
-            <a:off x="5349240" y="1783080"/>
-            <a:ext cx="6522415" cy="4663440"/>
+            <a:off x="5349240" y="1737360"/>
+            <a:ext cx="6522415" cy="457200"/>
+          </a:xfrm>
+          <a:prstGeom prst="rect">
+            <a:avLst/>
+          </a:prstGeom>
+          <a:noFill/>
+          <a:ln/>
+        </p:spPr>
+        <p:txBody>
+          <a:bodyPr wrap="square" lIns="0" tIns="0" rIns="0" bIns="0" rtlCol="0" anchor="ctr"/>
+          <a:lstStyle/>
+          <a:p>
+            <a:pPr algn="l" indent="0" marL="0">
+              <a:buNone/>
+            </a:pPr>
+            <a:r>
+              <a:rPr lang="en-US" sz="2800" b="1" dirty="0">
+                <a:solidFill>
+                  <a:srgbClr val="990011"/>
+                </a:solidFill>
+                <a:latin typeface="Times New Roman" pitchFamily="34" charset="0"/>
+                <a:ea typeface="Times New Roman" pitchFamily="34" charset="-122"/>
+                <a:cs typeface="Times New Roman" pitchFamily="34" charset="-120"/>
+              </a:rPr>
+              <a:t>A) Negative Implications (continued)</a:t>
+            </a:r>
+            <a:endParaRPr lang="en-US" sz="2800" dirty="0"/>
+          </a:p>
+        </p:txBody>
+      </p:sp>
+      <p:sp>
+        <p:nvSpPr>
+          <p:cNvPr id="6" name="Text 3"/>
+          <p:cNvSpPr/>
+          <p:nvPr/>
+        </p:nvSpPr>
+        <p:spPr>
+          <a:xfrm>
+            <a:off x="5349240" y="2240280"/>
+            <a:ext cx="6522415" cy="4206240"/>
           </a:xfrm>
           <a:prstGeom prst="rect">
             <a:avLst/>
@@ -14042,43 +14209,6 @@
                 <a:cs typeface="Times New Roman" pitchFamily="34" charset="-120"/>
               </a:rPr>
               <a:t>Forests are cleared and soils are overused.</a:t>
-            </a:r>
-            <a:endParaRPr lang="en-US" sz="4000" dirty="0"/>
-          </a:p>
-          <a:p>
-            <a:pPr algn="l" indent="0" marL="0">
-              <a:spcAft>
-                <a:spcPts val="800"/>
-              </a:spcAft>
-              <a:buNone/>
-            </a:pPr>
-            <a:r>
-              <a:rPr lang="en-US" sz="4000" b="1" dirty="0">
-                <a:solidFill>
-                  <a:srgbClr val="111111"/>
-                </a:solidFill>
-                <a:latin typeface="Times New Roman" pitchFamily="34" charset="0"/>
-                <a:ea typeface="Times New Roman" pitchFamily="34" charset="-122"/>
-                <a:cs typeface="Times New Roman" pitchFamily="34" charset="-120"/>
-              </a:rPr>
-              <a:t>Positive: </a:t>
-            </a:r>
-            <a:pPr algn="l" indent="0" marL="0">
-              <a:spcAft>
-                <a:spcPts val="800"/>
-              </a:spcAft>
-              <a:buNone/>
-            </a:pPr>
-            <a:r>
-              <a:rPr lang="en-US" sz="4000" dirty="0">
-                <a:solidFill>
-                  <a:srgbClr val="111111"/>
-                </a:solidFill>
-                <a:latin typeface="Times New Roman" pitchFamily="34" charset="0"/>
-                <a:ea typeface="Times New Roman" pitchFamily="34" charset="-122"/>
-                <a:cs typeface="Times New Roman" pitchFamily="34" charset="-120"/>
-              </a:rPr>
-              <a:t>A large population can provide labour and a big market.</a:t>
             </a:r>
             <a:endParaRPr lang="en-US" sz="4000" dirty="0"/>
           </a:p>
@@ -14196,48 +14326,9 @@
           </a:p>
         </p:txBody>
       </p:sp>
-      <p:sp>
-        <p:nvSpPr>
-          <p:cNvPr id="3" name="Text 1"/>
-          <p:cNvSpPr/>
-          <p:nvPr/>
-        </p:nvSpPr>
-        <p:spPr>
-          <a:xfrm>
-            <a:off x="457200" y="1005840"/>
-            <a:ext cx="11277295" cy="731520"/>
-          </a:xfrm>
-          <a:prstGeom prst="rect">
-            <a:avLst/>
-          </a:prstGeom>
-          <a:noFill/>
-          <a:ln/>
-        </p:spPr>
-        <p:txBody>
-          <a:bodyPr wrap="square" lIns="0" tIns="0" rIns="0" bIns="0" rtlCol="0" anchor="ctr"/>
-          <a:lstStyle/>
-          <a:p>
-            <a:pPr algn="ctr" indent="0" marL="0">
-              <a:buNone/>
-            </a:pPr>
-            <a:r>
-              <a:rPr lang="en-US" sz="3600" b="1" dirty="0">
-                <a:solidFill>
-                  <a:srgbClr val="990011"/>
-                </a:solidFill>
-                <a:latin typeface="Times New Roman" pitchFamily="34" charset="0"/>
-                <a:ea typeface="Times New Roman" pitchFamily="34" charset="-122"/>
-                <a:cs typeface="Times New Roman" pitchFamily="34" charset="-120"/>
-              </a:rPr>
-              <a:t>2. Implications</a:t>
-            </a:r>
-            <a:endParaRPr lang="en-US" sz="3600" dirty="0"/>
-          </a:p>
-        </p:txBody>
-      </p:sp>
       <p:pic>
         <p:nvPicPr>
-          <p:cNvPr id="4" name="Image 0" descr="/home/claude/f4/img/v2/youth_ageing_big.png">    </p:cNvPr>
+          <p:cNvPr id="3" name="Image 0" descr="/home/claude/f4/img/minesec_sheet.png">    </p:cNvPr>
           <p:cNvPicPr>
             <a:picLocks noChangeAspect="1"/>
           </p:cNvPicPr>
@@ -14251,8 +14342,8 @@
         </p:blipFill>
         <p:spPr>
           <a:xfrm>
-            <a:off x="1215564" y="1783080"/>
-            <a:ext cx="9760567" cy="4270248"/>
+            <a:off x="0" y="658368"/>
+            <a:ext cx="3840480" cy="5833872"/>
           </a:xfrm>
           <a:prstGeom prst="rect">
             <a:avLst/>
@@ -14261,14 +14352,14 @@
       </p:pic>
       <p:sp>
         <p:nvSpPr>
-          <p:cNvPr id="5" name="Text 2"/>
+          <p:cNvPr id="4" name="Text 1"/>
           <p:cNvSpPr/>
           <p:nvPr/>
         </p:nvSpPr>
         <p:spPr>
           <a:xfrm>
-            <a:off x="457200" y="6089904"/>
-            <a:ext cx="11277295" cy="347472"/>
+            <a:off x="4069080" y="1005840"/>
+            <a:ext cx="7802575" cy="731520"/>
           </a:xfrm>
           <a:prstGeom prst="rect">
             <a:avLst/>
@@ -14277,24 +14368,181 @@
           <a:ln/>
         </p:spPr>
         <p:txBody>
-          <a:bodyPr wrap="square" lIns="0" tIns="0" rIns="0" bIns="0" rtlCol="0" anchor="ctr"/>
+          <a:bodyPr wrap="square" lIns="0" tIns="0" rIns="0" bIns="0" rtlCol="0" anchor="ctr">
+            <a:normAutofit/>
+          </a:bodyPr>
           <a:lstStyle/>
           <a:p>
             <a:pPr algn="ctr" indent="0" marL="0">
               <a:buNone/>
             </a:pPr>
             <a:r>
-              <a:rPr lang="en-US" sz="1800" i="1" dirty="0">
-                <a:solidFill>
-                  <a:srgbClr val="555555"/>
+              <a:rPr lang="en-US" sz="3600" b="1" dirty="0">
+                <a:solidFill>
+                  <a:srgbClr val="990011"/>
                 </a:solidFill>
                 <a:latin typeface="Times New Roman" pitchFamily="34" charset="0"/>
                 <a:ea typeface="Times New Roman" pitchFamily="34" charset="-122"/>
                 <a:cs typeface="Times New Roman" pitchFamily="34" charset="-120"/>
               </a:rPr>
-              <a:t>Illustration: a youthful population</a:t>
-            </a:r>
-            <a:endParaRPr lang="en-US" sz="1800" dirty="0"/>
+              <a:t>2. Implications</a:t>
+            </a:r>
+            <a:endParaRPr lang="en-US" sz="3600" dirty="0"/>
+          </a:p>
+        </p:txBody>
+      </p:sp>
+      <p:sp>
+        <p:nvSpPr>
+          <p:cNvPr id="5" name="Text 2"/>
+          <p:cNvSpPr/>
+          <p:nvPr/>
+        </p:nvSpPr>
+        <p:spPr>
+          <a:xfrm>
+            <a:off x="4069080" y="1737360"/>
+            <a:ext cx="7802575" cy="457200"/>
+          </a:xfrm>
+          <a:prstGeom prst="rect">
+            <a:avLst/>
+          </a:prstGeom>
+          <a:noFill/>
+          <a:ln/>
+        </p:spPr>
+        <p:txBody>
+          <a:bodyPr wrap="square" lIns="0" tIns="0" rIns="0" bIns="0" rtlCol="0" anchor="ctr"/>
+          <a:lstStyle/>
+          <a:p>
+            <a:pPr algn="l" indent="0" marL="0">
+              <a:buNone/>
+            </a:pPr>
+            <a:r>
+              <a:rPr lang="en-US" sz="3200" b="1" dirty="0">
+                <a:solidFill>
+                  <a:srgbClr val="990011"/>
+                </a:solidFill>
+                <a:latin typeface="Times New Roman" pitchFamily="34" charset="0"/>
+                <a:ea typeface="Times New Roman" pitchFamily="34" charset="-122"/>
+                <a:cs typeface="Times New Roman" pitchFamily="34" charset="-120"/>
+              </a:rPr>
+              <a:t>B) Positive Implications</a:t>
+            </a:r>
+            <a:endParaRPr lang="en-US" sz="3200" dirty="0"/>
+          </a:p>
+        </p:txBody>
+      </p:sp>
+      <p:sp>
+        <p:nvSpPr>
+          <p:cNvPr id="6" name="Text 3"/>
+          <p:cNvSpPr/>
+          <p:nvPr/>
+        </p:nvSpPr>
+        <p:spPr>
+          <a:xfrm>
+            <a:off x="4069080" y="2240280"/>
+            <a:ext cx="7802575" cy="4206240"/>
+          </a:xfrm>
+          <a:prstGeom prst="rect">
+            <a:avLst/>
+          </a:prstGeom>
+          <a:noFill/>
+          <a:ln/>
+        </p:spPr>
+        <p:txBody>
+          <a:bodyPr wrap="square" lIns="0" tIns="0" rIns="0" bIns="0" rtlCol="0" anchor="t"/>
+          <a:lstStyle/>
+          <a:p>
+            <a:pPr algn="l" indent="0" marL="0">
+              <a:spcAft>
+                <a:spcPts val="800"/>
+              </a:spcAft>
+              <a:buNone/>
+            </a:pPr>
+            <a:r>
+              <a:rPr lang="en-US" sz="4000" i="1" dirty="0">
+                <a:solidFill>
+                  <a:srgbClr val="111111"/>
+                </a:solidFill>
+                <a:latin typeface="Times New Roman" pitchFamily="34" charset="0"/>
+                <a:ea typeface="Times New Roman" pitchFamily="34" charset="-122"/>
+                <a:cs typeface="Times New Roman" pitchFamily="34" charset="-120"/>
+              </a:rPr>
+              <a:t>Rapid population growth has the following positive implications:</a:t>
+            </a:r>
+            <a:endParaRPr lang="en-US" sz="4000" dirty="0"/>
+          </a:p>
+          <a:p>
+            <a:pPr algn="l" indent="0" marL="0">
+              <a:spcAft>
+                <a:spcPts val="800"/>
+              </a:spcAft>
+              <a:buNone/>
+            </a:pPr>
+            <a:r>
+              <a:rPr lang="en-US" sz="4000" b="1" dirty="0">
+                <a:solidFill>
+                  <a:srgbClr val="111111"/>
+                </a:solidFill>
+                <a:latin typeface="Times New Roman" pitchFamily="34" charset="0"/>
+                <a:ea typeface="Times New Roman" pitchFamily="34" charset="-122"/>
+                <a:cs typeface="Times New Roman" pitchFamily="34" charset="-120"/>
+              </a:rPr>
+              <a:t>Labour: </a:t>
+            </a:r>
+            <a:pPr algn="l" indent="0" marL="0">
+              <a:spcAft>
+                <a:spcPts val="800"/>
+              </a:spcAft>
+              <a:buNone/>
+            </a:pPr>
+            <a:r>
+              <a:rPr lang="en-US" sz="4000" dirty="0">
+                <a:solidFill>
+                  <a:srgbClr val="111111"/>
+                </a:solidFill>
+                <a:latin typeface="Times New Roman" pitchFamily="34" charset="0"/>
+                <a:ea typeface="Times New Roman" pitchFamily="34" charset="-122"/>
+                <a:cs typeface="Times New Roman" pitchFamily="34" charset="-120"/>
+              </a:rPr>
+              <a:t>Many young people can work.</a:t>
+            </a:r>
+            <a:endParaRPr lang="en-US" sz="4000" dirty="0"/>
+          </a:p>
+          <a:p>
+            <a:pPr algn="l" indent="0" marL="0">
+              <a:spcAft>
+                <a:spcPts val="800"/>
+              </a:spcAft>
+              <a:buNone/>
+            </a:pPr>
+            <a:r>
+              <a:rPr lang="en-US" sz="4000" b="1" dirty="0">
+                <a:solidFill>
+                  <a:srgbClr val="111111"/>
+                </a:solidFill>
+                <a:latin typeface="Times New Roman" pitchFamily="34" charset="0"/>
+                <a:ea typeface="Times New Roman" pitchFamily="34" charset="-122"/>
+                <a:cs typeface="Times New Roman" pitchFamily="34" charset="-120"/>
+              </a:rPr>
+              <a:t>A big market: </a:t>
+            </a:r>
+            <a:pPr algn="l" indent="0" marL="0">
+              <a:spcAft>
+                <a:spcPts val="800"/>
+              </a:spcAft>
+              <a:buNone/>
+            </a:pPr>
+            <a:r>
+              <a:rPr lang="en-US" sz="4000" dirty="0">
+                <a:solidFill>
+                  <a:srgbClr val="111111"/>
+                </a:solidFill>
+                <a:latin typeface="Times New Roman" pitchFamily="34" charset="0"/>
+                <a:ea typeface="Times New Roman" pitchFamily="34" charset="-122"/>
+                <a:cs typeface="Times New Roman" pitchFamily="34" charset="-120"/>
+              </a:rPr>
+              <a:t>Many consumers buy goods.</a:t>
+            </a:r>
+            <a:endParaRPr lang="en-US" sz="4000" dirty="0"/>
           </a:p>
         </p:txBody>
       </p:sp>
@@ -14404,15 +14652,54 @@
                 <a:ea typeface="Calibri" pitchFamily="34" charset="-122"/>
                 <a:cs typeface="Calibri" pitchFamily="34" charset="-120"/>
               </a:rPr>
-              <a:t>FORMATIVE EVALUATION</a:t>
+              <a:t>BOARD SUMMARY</a:t>
             </a:r>
             <a:endParaRPr lang="en-US" sz="1400" dirty="0"/>
+          </a:p>
+        </p:txBody>
+      </p:sp>
+      <p:sp>
+        <p:nvSpPr>
+          <p:cNvPr id="3" name="Text 1"/>
+          <p:cNvSpPr/>
+          <p:nvPr/>
+        </p:nvSpPr>
+        <p:spPr>
+          <a:xfrm>
+            <a:off x="457200" y="1005840"/>
+            <a:ext cx="11277295" cy="731520"/>
+          </a:xfrm>
+          <a:prstGeom prst="rect">
+            <a:avLst/>
+          </a:prstGeom>
+          <a:noFill/>
+          <a:ln/>
+        </p:spPr>
+        <p:txBody>
+          <a:bodyPr wrap="square" lIns="0" tIns="0" rIns="0" bIns="0" rtlCol="0" anchor="ctr"/>
+          <a:lstStyle/>
+          <a:p>
+            <a:pPr algn="ctr" indent="0" marL="0">
+              <a:buNone/>
+            </a:pPr>
+            <a:r>
+              <a:rPr lang="en-US" sz="3600" b="1" dirty="0">
+                <a:solidFill>
+                  <a:srgbClr val="990011"/>
+                </a:solidFill>
+                <a:latin typeface="Times New Roman" pitchFamily="34" charset="0"/>
+                <a:ea typeface="Times New Roman" pitchFamily="34" charset="-122"/>
+                <a:cs typeface="Times New Roman" pitchFamily="34" charset="-120"/>
+              </a:rPr>
+              <a:t>2. Implications</a:t>
+            </a:r>
+            <a:endParaRPr lang="en-US" sz="3600" dirty="0"/>
           </a:p>
         </p:txBody>
       </p:sp>
       <p:pic>
         <p:nvPicPr>
-          <p:cNvPr id="3" name="Image 0" descr="/home/claude/f4/img/minesec_sheet.png">    </p:cNvPr>
+          <p:cNvPr id="4" name="Image 0" descr="/home/claude/f4/img/v2/youth_ageing_big.png">    </p:cNvPr>
           <p:cNvPicPr>
             <a:picLocks noChangeAspect="1"/>
           </p:cNvPicPr>
@@ -14426,8 +14713,8 @@
         </p:blipFill>
         <p:spPr>
           <a:xfrm>
-            <a:off x="0" y="658368"/>
-            <a:ext cx="5120640" cy="5833872"/>
+            <a:off x="1215564" y="1783080"/>
+            <a:ext cx="9760567" cy="4270248"/>
           </a:xfrm>
           <a:prstGeom prst="rect">
             <a:avLst/>
@@ -14436,14 +14723,14 @@
       </p:pic>
       <p:sp>
         <p:nvSpPr>
-          <p:cNvPr id="4" name="Text 1"/>
+          <p:cNvPr id="5" name="Text 2"/>
           <p:cNvSpPr/>
           <p:nvPr/>
         </p:nvSpPr>
         <p:spPr>
           <a:xfrm>
-            <a:off x="5349240" y="1005840"/>
-            <a:ext cx="6522415" cy="731520"/>
+            <a:off x="457200" y="6089904"/>
+            <a:ext cx="11277295" cy="347472"/>
           </a:xfrm>
           <a:prstGeom prst="rect">
             <a:avLst/>
@@ -14452,68 +14739,24 @@
           <a:ln/>
         </p:spPr>
         <p:txBody>
-          <a:bodyPr wrap="square" lIns="0" tIns="0" rIns="0" bIns="0" rtlCol="0" anchor="ctr">
-            <a:normAutofit/>
-          </a:bodyPr>
+          <a:bodyPr wrap="square" lIns="0" tIns="0" rIns="0" bIns="0" rtlCol="0" anchor="ctr"/>
           <a:lstStyle/>
           <a:p>
             <a:pPr algn="ctr" indent="0" marL="0">
               <a:buNone/>
             </a:pPr>
             <a:r>
-              <a:rPr lang="en-US" sz="3600" b="1" dirty="0">
-                <a:solidFill>
-                  <a:srgbClr val="990011"/>
+              <a:rPr lang="en-US" sz="1800" i="1" dirty="0">
+                <a:solidFill>
+                  <a:srgbClr val="555555"/>
                 </a:solidFill>
                 <a:latin typeface="Times New Roman" pitchFamily="34" charset="0"/>
                 <a:ea typeface="Times New Roman" pitchFamily="34" charset="-122"/>
                 <a:cs typeface="Times New Roman" pitchFamily="34" charset="-120"/>
               </a:rPr>
-              <a:t>Evaluation 1</a:t>
-            </a:r>
-            <a:endParaRPr lang="en-US" sz="3600" dirty="0"/>
-          </a:p>
-        </p:txBody>
-      </p:sp>
-      <p:sp>
-        <p:nvSpPr>
-          <p:cNvPr id="5" name="Text 2"/>
-          <p:cNvSpPr/>
-          <p:nvPr/>
-        </p:nvSpPr>
-        <p:spPr>
-          <a:xfrm>
-            <a:off x="5349240" y="1783080"/>
-            <a:ext cx="6522415" cy="4663440"/>
-          </a:xfrm>
-          <a:prstGeom prst="rect">
-            <a:avLst/>
-          </a:prstGeom>
-          <a:noFill/>
-          <a:ln/>
-        </p:spPr>
-        <p:txBody>
-          <a:bodyPr wrap="square" lIns="0" tIns="0" rIns="0" bIns="0" rtlCol="0" anchor="t"/>
-          <a:lstStyle/>
-          <a:p>
-            <a:pPr algn="l" indent="0" marL="0">
-              <a:spcAft>
-                <a:spcPts val="800"/>
-              </a:spcAft>
-              <a:buNone/>
-            </a:pPr>
-            <a:r>
-              <a:rPr lang="en-US" sz="4000" dirty="0">
-                <a:solidFill>
-                  <a:srgbClr val="111111"/>
-                </a:solidFill>
-                <a:latin typeface="Times New Roman" pitchFamily="34" charset="0"/>
-                <a:ea typeface="Times New Roman" pitchFamily="34" charset="-122"/>
-                <a:cs typeface="Times New Roman" pitchFamily="34" charset="-120"/>
-              </a:rPr>
-              <a:t>Give two reasons for rapid population growth in LICs.</a:t>
-            </a:r>
-            <a:endParaRPr lang="en-US" sz="4000" dirty="0"/>
+              <a:t>Illustration: a youthful population</a:t>
+            </a:r>
+            <a:endParaRPr lang="en-US" sz="1800" dirty="0"/>
           </a:p>
         </p:txBody>
       </p:sp>
@@ -14927,7 +15170,7 @@
                 <a:ea typeface="Times New Roman" pitchFamily="34" charset="-122"/>
                 <a:cs typeface="Times New Roman" pitchFamily="34" charset="-120"/>
               </a:rPr>
-              <a:t>Expected Answer</a:t>
+              <a:t>Evaluation 1</a:t>
             </a:r>
             <a:endParaRPr lang="en-US" sz="3600" dirty="0"/>
           </a:p>
@@ -14969,7 +15212,7 @@
                 <a:ea typeface="Times New Roman" pitchFamily="34" charset="-122"/>
                 <a:cs typeface="Times New Roman" pitchFamily="34" charset="-120"/>
               </a:rPr>
-              <a:t>Early marriages and falling death rates.</a:t>
+              <a:t>Give two reasons for rapid population growth in LICs.</a:t>
             </a:r>
             <a:endParaRPr lang="en-US" sz="4000" dirty="0"/>
           </a:p>
@@ -15146,7 +15389,7 @@
                 <a:ea typeface="Times New Roman" pitchFamily="34" charset="-122"/>
                 <a:cs typeface="Times New Roman" pitchFamily="34" charset="-120"/>
               </a:rPr>
-              <a:t>Evaluation 2</a:t>
+              <a:t>Expected Answer</a:t>
             </a:r>
             <a:endParaRPr lang="en-US" sz="3600" dirty="0"/>
           </a:p>
@@ -15188,7 +15431,7 @@
                 <a:ea typeface="Times New Roman" pitchFamily="34" charset="-122"/>
                 <a:cs typeface="Times New Roman" pitchFamily="34" charset="-120"/>
               </a:rPr>
-              <a:t>Give two implications.</a:t>
+              <a:t>Early marriages and falling death rates.</a:t>
             </a:r>
             <a:endParaRPr lang="en-US" sz="4000" dirty="0"/>
           </a:p>
@@ -15365,7 +15608,7 @@
                 <a:ea typeface="Times New Roman" pitchFamily="34" charset="-122"/>
                 <a:cs typeface="Times New Roman" pitchFamily="34" charset="-120"/>
               </a:rPr>
-              <a:t>Expected Answer</a:t>
+              <a:t>Evaluation 2</a:t>
             </a:r>
             <a:endParaRPr lang="en-US" sz="3600" dirty="0"/>
           </a:p>
@@ -15407,7 +15650,7 @@
                 <a:ea typeface="Times New Roman" pitchFamily="34" charset="-122"/>
                 <a:cs typeface="Times New Roman" pitchFamily="34" charset="-120"/>
               </a:rPr>
-              <a:t>Unemployment and overcrowded schools.</a:t>
+              <a:t>Give two implications.</a:t>
             </a:r>
             <a:endParaRPr lang="en-US" sz="4000" dirty="0"/>
           </a:p>
@@ -15519,7 +15762,7 @@
                 <a:ea typeface="Calibri" pitchFamily="34" charset="-122"/>
                 <a:cs typeface="Calibri" pitchFamily="34" charset="-120"/>
               </a:rPr>
-              <a:t>REMEDIATION</a:t>
+              <a:t>FORMATIVE EVALUATION</a:t>
             </a:r>
             <a:endParaRPr lang="en-US" sz="1400" dirty="0"/>
           </a:p>
@@ -15542,7 +15785,7 @@
         <p:spPr>
           <a:xfrm>
             <a:off x="0" y="658368"/>
-            <a:ext cx="1463040" cy="5833872"/>
+            <a:ext cx="5120640" cy="5833872"/>
           </a:xfrm>
           <a:prstGeom prst="rect">
             <a:avLst/>
@@ -15557,8 +15800,8 @@
         </p:nvSpPr>
         <p:spPr>
           <a:xfrm>
-            <a:off x="1691640" y="1005840"/>
-            <a:ext cx="10180015" cy="731520"/>
+            <a:off x="5349240" y="1005840"/>
+            <a:ext cx="6522415" cy="731520"/>
           </a:xfrm>
           <a:prstGeom prst="rect">
             <a:avLst/>
@@ -15584,7 +15827,7 @@
                 <a:ea typeface="Times New Roman" pitchFamily="34" charset="-122"/>
                 <a:cs typeface="Times New Roman" pitchFamily="34" charset="-120"/>
               </a:rPr>
-              <a:t>Remediation</a:t>
+              <a:t>Expected Answer</a:t>
             </a:r>
             <a:endParaRPr lang="en-US" sz="3600" dirty="0"/>
           </a:p>
@@ -15598,8 +15841,8 @@
         </p:nvSpPr>
         <p:spPr>
           <a:xfrm>
-            <a:off x="1691640" y="1783080"/>
-            <a:ext cx="10180015" cy="4663440"/>
+            <a:off x="5349240" y="1783080"/>
+            <a:ext cx="6522415" cy="4663440"/>
           </a:xfrm>
           <a:prstGeom prst="rect">
             <a:avLst/>
@@ -15618,7 +15861,7 @@
               <a:buNone/>
             </a:pPr>
             <a:r>
-              <a:rPr lang="en-US" sz="4000" b="1" dirty="0">
+              <a:rPr lang="en-US" sz="4000" dirty="0">
                 <a:solidFill>
                   <a:srgbClr val="111111"/>
                 </a:solidFill>
@@ -15626,73 +15869,7 @@
                 <a:ea typeface="Times New Roman" pitchFamily="34" charset="-122"/>
                 <a:cs typeface="Times New Roman" pitchFamily="34" charset="-120"/>
               </a:rPr>
-              <a:t>Fill in the blanks:</a:t>
-            </a:r>
-            <a:endParaRPr lang="en-US" sz="4000" dirty="0"/>
-          </a:p>
-          <a:p>
-            <a:pPr algn="l" marL="342900" indent="-342900">
-              <a:spcAft>
-                <a:spcPts val="800"/>
-              </a:spcAft>
-              <a:buSzPct val="100000"/>
-              <a:buFont typeface="+mj-lt"/>
-              <a:buAutoNum type="arabicPeriod" startAt="1"/>
-            </a:pPr>
-            <a:r>
-              <a:rPr lang="en-US" sz="4000" dirty="0">
-                <a:solidFill>
-                  <a:srgbClr val="111111"/>
-                </a:solidFill>
-                <a:latin typeface="Times New Roman" pitchFamily="34" charset="0"/>
-                <a:ea typeface="Times New Roman" pitchFamily="34" charset="-122"/>
-                <a:cs typeface="Times New Roman" pitchFamily="34" charset="-120"/>
-              </a:rPr>
-              <a:t>Marriage of young girls is ______ marriage.</a:t>
-            </a:r>
-            <a:endParaRPr lang="en-US" sz="4000" dirty="0"/>
-          </a:p>
-          <a:p>
-            <a:pPr algn="l" marL="342900" indent="-342900">
-              <a:spcAft>
-                <a:spcPts val="800"/>
-              </a:spcAft>
-              <a:buSzPct val="100000"/>
-              <a:buFont typeface="+mj-lt"/>
-              <a:buAutoNum type="arabicPeriod" startAt="1"/>
-            </a:pPr>
-            <a:r>
-              <a:rPr lang="en-US" sz="4000" dirty="0">
-                <a:solidFill>
-                  <a:srgbClr val="111111"/>
-                </a:solidFill>
-                <a:latin typeface="Times New Roman" pitchFamily="34" charset="0"/>
-                <a:ea typeface="Times New Roman" pitchFamily="34" charset="-122"/>
-                <a:cs typeface="Times New Roman" pitchFamily="34" charset="-120"/>
-              </a:rPr>
-              <a:t>Family planning reduces the ______ rate.</a:t>
-            </a:r>
-            <a:endParaRPr lang="en-US" sz="4000" dirty="0"/>
-          </a:p>
-          <a:p>
-            <a:pPr algn="l" marL="342900" indent="-342900">
-              <a:spcAft>
-                <a:spcPts val="800"/>
-              </a:spcAft>
-              <a:buSzPct val="100000"/>
-              <a:buFont typeface="+mj-lt"/>
-              <a:buAutoNum type="arabicPeriod" startAt="1"/>
-            </a:pPr>
-            <a:r>
-              <a:rPr lang="en-US" sz="4000" dirty="0">
-                <a:solidFill>
-                  <a:srgbClr val="111111"/>
-                </a:solidFill>
-                <a:latin typeface="Times New Roman" pitchFamily="34" charset="0"/>
-                <a:ea typeface="Times New Roman" pitchFamily="34" charset="-122"/>
-                <a:cs typeface="Times New Roman" pitchFamily="34" charset="-120"/>
-              </a:rPr>
-              <a:t>Too many people for the jobs available causes ______.</a:t>
+              <a:t>Unemployment and overcrowded schools.</a:t>
             </a:r>
             <a:endParaRPr lang="en-US" sz="4000" dirty="0"/>
           </a:p>
@@ -15804,7 +15981,7 @@
                 <a:ea typeface="Calibri" pitchFamily="34" charset="-122"/>
                 <a:cs typeface="Calibri" pitchFamily="34" charset="-120"/>
               </a:rPr>
-              <a:t>HOMEWORK</a:t>
+              <a:t>REMEDIATION</a:t>
             </a:r>
             <a:endParaRPr lang="en-US" sz="1400" dirty="0"/>
           </a:p>
@@ -15827,7 +16004,7 @@
         <p:spPr>
           <a:xfrm>
             <a:off x="0" y="658368"/>
-            <a:ext cx="5120640" cy="5833872"/>
+            <a:ext cx="1463040" cy="5833872"/>
           </a:xfrm>
           <a:prstGeom prst="rect">
             <a:avLst/>
@@ -15842,8 +16019,8 @@
         </p:nvSpPr>
         <p:spPr>
           <a:xfrm>
-            <a:off x="5349240" y="1005840"/>
-            <a:ext cx="6522415" cy="731520"/>
+            <a:off x="1691640" y="1005840"/>
+            <a:ext cx="10180015" cy="731520"/>
           </a:xfrm>
           <a:prstGeom prst="rect">
             <a:avLst/>
@@ -15869,7 +16046,7 @@
                 <a:ea typeface="Times New Roman" pitchFamily="34" charset="-122"/>
                 <a:cs typeface="Times New Roman" pitchFamily="34" charset="-120"/>
               </a:rPr>
-              <a:t>Homework</a:t>
+              <a:t>Remediation</a:t>
             </a:r>
             <a:endParaRPr lang="en-US" sz="3600" dirty="0"/>
           </a:p>
@@ -15883,8 +16060,8 @@
         </p:nvSpPr>
         <p:spPr>
           <a:xfrm>
-            <a:off x="5349240" y="1783080"/>
-            <a:ext cx="6522415" cy="4663440"/>
+            <a:off x="1691640" y="1783080"/>
+            <a:ext cx="10180015" cy="4663440"/>
           </a:xfrm>
           <a:prstGeom prst="rect">
             <a:avLst/>
@@ -15903,7 +16080,7 @@
               <a:buNone/>
             </a:pPr>
             <a:r>
-              <a:rPr lang="en-US" sz="4000" dirty="0">
+              <a:rPr lang="en-US" sz="4000" b="1" dirty="0">
                 <a:solidFill>
                   <a:srgbClr val="111111"/>
                 </a:solidFill>
@@ -15911,7 +16088,73 @@
                 <a:ea typeface="Times New Roman" pitchFamily="34" charset="-122"/>
                 <a:cs typeface="Times New Roman" pitchFamily="34" charset="-120"/>
               </a:rPr>
-              <a:t>Explain three ways rapid population growth affects your town.</a:t>
+              <a:t>Fill in the blanks:</a:t>
+            </a:r>
+            <a:endParaRPr lang="en-US" sz="4000" dirty="0"/>
+          </a:p>
+          <a:p>
+            <a:pPr algn="l" marL="342900" indent="-342900">
+              <a:spcAft>
+                <a:spcPts val="800"/>
+              </a:spcAft>
+              <a:buSzPct val="100000"/>
+              <a:buFont typeface="+mj-lt"/>
+              <a:buAutoNum type="arabicPeriod" startAt="1"/>
+            </a:pPr>
+            <a:r>
+              <a:rPr lang="en-US" sz="4000" dirty="0">
+                <a:solidFill>
+                  <a:srgbClr val="111111"/>
+                </a:solidFill>
+                <a:latin typeface="Times New Roman" pitchFamily="34" charset="0"/>
+                <a:ea typeface="Times New Roman" pitchFamily="34" charset="-122"/>
+                <a:cs typeface="Times New Roman" pitchFamily="34" charset="-120"/>
+              </a:rPr>
+              <a:t>Marriage of young girls is ______ marriage.</a:t>
+            </a:r>
+            <a:endParaRPr lang="en-US" sz="4000" dirty="0"/>
+          </a:p>
+          <a:p>
+            <a:pPr algn="l" marL="342900" indent="-342900">
+              <a:spcAft>
+                <a:spcPts val="800"/>
+              </a:spcAft>
+              <a:buSzPct val="100000"/>
+              <a:buFont typeface="+mj-lt"/>
+              <a:buAutoNum type="arabicPeriod" startAt="1"/>
+            </a:pPr>
+            <a:r>
+              <a:rPr lang="en-US" sz="4000" dirty="0">
+                <a:solidFill>
+                  <a:srgbClr val="111111"/>
+                </a:solidFill>
+                <a:latin typeface="Times New Roman" pitchFamily="34" charset="0"/>
+                <a:ea typeface="Times New Roman" pitchFamily="34" charset="-122"/>
+                <a:cs typeface="Times New Roman" pitchFamily="34" charset="-120"/>
+              </a:rPr>
+              <a:t>Family planning reduces the ______ rate.</a:t>
+            </a:r>
+            <a:endParaRPr lang="en-US" sz="4000" dirty="0"/>
+          </a:p>
+          <a:p>
+            <a:pPr algn="l" marL="342900" indent="-342900">
+              <a:spcAft>
+                <a:spcPts val="800"/>
+              </a:spcAft>
+              <a:buSzPct val="100000"/>
+              <a:buFont typeface="+mj-lt"/>
+              <a:buAutoNum type="arabicPeriod" startAt="1"/>
+            </a:pPr>
+            <a:r>
+              <a:rPr lang="en-US" sz="4000" dirty="0">
+                <a:solidFill>
+                  <a:srgbClr val="111111"/>
+                </a:solidFill>
+                <a:latin typeface="Times New Roman" pitchFamily="34" charset="0"/>
+                <a:ea typeface="Times New Roman" pitchFamily="34" charset="-122"/>
+                <a:cs typeface="Times New Roman" pitchFamily="34" charset="-120"/>
+              </a:rPr>
+              <a:t>Too many people for the jobs available causes ______.</a:t>
             </a:r>
             <a:endParaRPr lang="en-US" sz="4000" dirty="0"/>
           </a:p>
@@ -16023,7 +16266,7 @@
                 <a:ea typeface="Calibri" pitchFamily="34" charset="-122"/>
                 <a:cs typeface="Calibri" pitchFamily="34" charset="-120"/>
               </a:rPr>
-              <a:t>NEXT LESSON</a:t>
+              <a:t>HOMEWORK</a:t>
             </a:r>
             <a:endParaRPr lang="en-US" sz="1400" dirty="0"/>
           </a:p>
@@ -16088,7 +16331,7 @@
                 <a:ea typeface="Times New Roman" pitchFamily="34" charset="-122"/>
                 <a:cs typeface="Times New Roman" pitchFamily="34" charset="-120"/>
               </a:rPr>
-              <a:t>Next Lesson</a:t>
+              <a:t>Homework</a:t>
             </a:r>
             <a:endParaRPr lang="en-US" sz="3600" dirty="0"/>
           </a:p>
@@ -16112,17 +16355,17 @@
           <a:ln/>
         </p:spPr>
         <p:txBody>
-          <a:bodyPr wrap="square" lIns="0" tIns="0" rIns="0" bIns="0" rtlCol="0" anchor="ctr"/>
-          <a:lstStyle/>
-          <a:p>
-            <a:pPr algn="ctr" indent="0" marL="0">
+          <a:bodyPr wrap="square" lIns="0" tIns="0" rIns="0" bIns="0" rtlCol="0" anchor="t"/>
+          <a:lstStyle/>
+          <a:p>
+            <a:pPr algn="l" indent="0" marL="0">
               <a:spcAft>
                 <a:spcPts val="800"/>
               </a:spcAft>
               <a:buNone/>
             </a:pPr>
             <a:r>
-              <a:rPr lang="en-US" sz="4000" b="1" dirty="0">
+              <a:rPr lang="en-US" sz="4000" dirty="0">
                 <a:solidFill>
                   <a:srgbClr val="111111"/>
                 </a:solidFill>
@@ -16130,27 +16373,7 @@
                 <a:ea typeface="Times New Roman" pitchFamily="34" charset="-122"/>
                 <a:cs typeface="Times New Roman" pitchFamily="34" charset="-120"/>
               </a:rPr>
-              <a:t>Our next lesson will be on:</a:t>
-            </a:r>
-            <a:endParaRPr lang="en-US" sz="4000" dirty="0"/>
-          </a:p>
-          <a:p>
-            <a:pPr algn="ctr" indent="0" marL="0">
-              <a:spcAft>
-                <a:spcPts val="800"/>
-              </a:spcAft>
-              <a:buNone/>
-            </a:pPr>
-            <a:r>
-              <a:rPr lang="en-US" sz="4000" b="1" dirty="0">
-                <a:solidFill>
-                  <a:srgbClr val="990011"/>
-                </a:solidFill>
-                <a:latin typeface="Times New Roman" pitchFamily="34" charset="0"/>
-                <a:ea typeface="Times New Roman" pitchFamily="34" charset="-122"/>
-                <a:cs typeface="Times New Roman" pitchFamily="34" charset="-120"/>
-              </a:rPr>
-              <a:t>Further Study 4: Control of Population Growth</a:t>
+              <a:t>Explain three ways rapid population growth affects your town.</a:t>
             </a:r>
             <a:endParaRPr lang="en-US" sz="4000" dirty="0"/>
           </a:p>
@@ -16262,6 +16485,245 @@
                 <a:ea typeface="Calibri" pitchFamily="34" charset="-122"/>
                 <a:cs typeface="Calibri" pitchFamily="34" charset="-120"/>
               </a:rPr>
+              <a:t>NEXT LESSON</a:t>
+            </a:r>
+            <a:endParaRPr lang="en-US" sz="1400" dirty="0"/>
+          </a:p>
+        </p:txBody>
+      </p:sp>
+      <p:pic>
+        <p:nvPicPr>
+          <p:cNvPr id="3" name="Image 0" descr="/home/claude/f4/img/minesec_sheet.png">    </p:cNvPr>
+          <p:cNvPicPr>
+            <a:picLocks noChangeAspect="1"/>
+          </p:cNvPicPr>
+          <p:nvPr/>
+        </p:nvPicPr>
+        <p:blipFill>
+          <a:blip r:embed="rId1"/>
+          <a:stretch>
+            <a:fillRect/>
+          </a:stretch>
+        </p:blipFill>
+        <p:spPr>
+          <a:xfrm>
+            <a:off x="0" y="658368"/>
+            <a:ext cx="5120640" cy="5833872"/>
+          </a:xfrm>
+          <a:prstGeom prst="rect">
+            <a:avLst/>
+          </a:prstGeom>
+        </p:spPr>
+      </p:pic>
+      <p:sp>
+        <p:nvSpPr>
+          <p:cNvPr id="4" name="Text 1"/>
+          <p:cNvSpPr/>
+          <p:nvPr/>
+        </p:nvSpPr>
+        <p:spPr>
+          <a:xfrm>
+            <a:off x="5349240" y="1005840"/>
+            <a:ext cx="6522415" cy="731520"/>
+          </a:xfrm>
+          <a:prstGeom prst="rect">
+            <a:avLst/>
+          </a:prstGeom>
+          <a:noFill/>
+          <a:ln/>
+        </p:spPr>
+        <p:txBody>
+          <a:bodyPr wrap="square" lIns="0" tIns="0" rIns="0" bIns="0" rtlCol="0" anchor="ctr">
+            <a:normAutofit/>
+          </a:bodyPr>
+          <a:lstStyle/>
+          <a:p>
+            <a:pPr algn="ctr" indent="0" marL="0">
+              <a:buNone/>
+            </a:pPr>
+            <a:r>
+              <a:rPr lang="en-US" sz="3600" b="1" dirty="0">
+                <a:solidFill>
+                  <a:srgbClr val="990011"/>
+                </a:solidFill>
+                <a:latin typeface="Times New Roman" pitchFamily="34" charset="0"/>
+                <a:ea typeface="Times New Roman" pitchFamily="34" charset="-122"/>
+                <a:cs typeface="Times New Roman" pitchFamily="34" charset="-120"/>
+              </a:rPr>
+              <a:t>Next Lesson</a:t>
+            </a:r>
+            <a:endParaRPr lang="en-US" sz="3600" dirty="0"/>
+          </a:p>
+        </p:txBody>
+      </p:sp>
+      <p:sp>
+        <p:nvSpPr>
+          <p:cNvPr id="5" name="Text 2"/>
+          <p:cNvSpPr/>
+          <p:nvPr/>
+        </p:nvSpPr>
+        <p:spPr>
+          <a:xfrm>
+            <a:off x="5349240" y="1783080"/>
+            <a:ext cx="6522415" cy="4663440"/>
+          </a:xfrm>
+          <a:prstGeom prst="rect">
+            <a:avLst/>
+          </a:prstGeom>
+          <a:noFill/>
+          <a:ln/>
+        </p:spPr>
+        <p:txBody>
+          <a:bodyPr wrap="square" lIns="0" tIns="0" rIns="0" bIns="0" rtlCol="0" anchor="ctr"/>
+          <a:lstStyle/>
+          <a:p>
+            <a:pPr algn="ctr" indent="0" marL="0">
+              <a:spcAft>
+                <a:spcPts val="800"/>
+              </a:spcAft>
+              <a:buNone/>
+            </a:pPr>
+            <a:r>
+              <a:rPr lang="en-US" sz="4000" b="1" dirty="0">
+                <a:solidFill>
+                  <a:srgbClr val="111111"/>
+                </a:solidFill>
+                <a:latin typeface="Times New Roman" pitchFamily="34" charset="0"/>
+                <a:ea typeface="Times New Roman" pitchFamily="34" charset="-122"/>
+                <a:cs typeface="Times New Roman" pitchFamily="34" charset="-120"/>
+              </a:rPr>
+              <a:t>Our next lesson will be on:</a:t>
+            </a:r>
+            <a:endParaRPr lang="en-US" sz="4000" dirty="0"/>
+          </a:p>
+          <a:p>
+            <a:pPr algn="ctr" indent="0" marL="0">
+              <a:spcAft>
+                <a:spcPts val="800"/>
+              </a:spcAft>
+              <a:buNone/>
+            </a:pPr>
+            <a:r>
+              <a:rPr lang="en-US" sz="4000" b="1" dirty="0">
+                <a:solidFill>
+                  <a:srgbClr val="990011"/>
+                </a:solidFill>
+                <a:latin typeface="Times New Roman" pitchFamily="34" charset="0"/>
+                <a:ea typeface="Times New Roman" pitchFamily="34" charset="-122"/>
+                <a:cs typeface="Times New Roman" pitchFamily="34" charset="-120"/>
+              </a:rPr>
+              <a:t>Further Study 4: Control of Population Growth</a:t>
+            </a:r>
+            <a:endParaRPr lang="en-US" sz="4000" dirty="0"/>
+          </a:p>
+        </p:txBody>
+      </p:sp>
+      <p:sp>
+        <p:nvSpPr>
+          <p:cNvPr id="25" name="Slide Number Placeholder 0"/>
+          <p:cNvSpPr>
+            <a:spLocks noGrp="1"/>
+          </p:cNvSpPr>
+          <p:nvPr>
+            <p:ph type="sldNum" sz="quarter" idx="4294967295"/>
+          </p:nvPr>
+        </p:nvSpPr>
+        <p:spPr>
+          <a:xfrm>
+            <a:off x="27432" y="91440"/>
+            <a:ext cx="585216" cy="475488"/>
+          </a:xfrm>
+          <a:prstGeom prst="rect">
+            <a:avLst/>
+          </a:prstGeom>
+          <a:extLst>
+            <a:ext uri="{C572A759-6A51-4108-AA02-DFA0A04FC94B}">
+              <ma14:wrappingTextBoxFlag xmlns:ma14="http://schemas.microsoft.com/office/mac/drawingml/2011/main" val="0"/>
+            </a:ext>
+          </a:extLst>
+        </p:spPr>
+        <p:txBody>
+          <a:bodyPr/>
+          <a:lstStyle>
+            <a:lvl1pPr>
+              <a:defRPr sz="2000">
+                <a:solidFill>
+                  <a:srgbClr val="FFFFFF"/>
+                </a:solidFill>
+                <a:latin typeface="Calibri"/>
+                <a:ea typeface="Calibri"/>
+                <a:cs typeface="Calibri"/>
+              </a:defRPr>
+            </a:lvl1pPr>
+          </a:lstStyle>
+          <a:p>
+            <a:pPr algn="ctr"/>
+            <a:fld id="{F7021451-1387-4CA6-816F-3879F97B5CBC}" type="slidenum">
+              <a:rPr b="1" lang="en-US"/>
+              <a:t>46</a:t>
+            </a:fld>
+            <a:endParaRPr lang="en-US"/>
+          </a:p>
+        </p:txBody>
+      </p:sp>
+    </p:spTree>
+  </p:cSld>
+  <p:clrMapOvr>
+    <a:masterClrMapping/>
+  </p:clrMapOvr>
+</p:sld>
+</file>
+
+<file path=ppt/slides/slide47.xml><?xml version="1.0" encoding="utf-8"?>
+<p:sld xmlns:a="http://schemas.openxmlformats.org/drawingml/2006/main" xmlns:r="http://schemas.openxmlformats.org/officeDocument/2006/relationships" xmlns:p="http://schemas.openxmlformats.org/presentationml/2006/main">
+  <p:cSld name="Slide 47">
+    <p:spTree>
+      <p:nvGrpSpPr>
+        <p:cNvPr id="1" name=""/>
+        <p:cNvGrpSpPr/>
+        <p:nvPr/>
+      </p:nvGrpSpPr>
+      <p:grpSpPr>
+        <a:xfrm>
+          <a:off x="0" y="0"/>
+          <a:ext cx="0" cy="0"/>
+          <a:chOff x="0" y="0"/>
+          <a:chExt cx="0" cy="0"/>
+        </a:xfrm>
+      </p:grpSpPr>
+      <p:sp>
+        <p:nvSpPr>
+          <p:cNvPr id="2" name="Text 0"/>
+          <p:cNvSpPr/>
+          <p:nvPr/>
+        </p:nvSpPr>
+        <p:spPr>
+          <a:xfrm>
+            <a:off x="457200" y="713232"/>
+            <a:ext cx="11368735" cy="274320"/>
+          </a:xfrm>
+          <a:prstGeom prst="rect">
+            <a:avLst/>
+          </a:prstGeom>
+          <a:noFill/>
+          <a:ln/>
+        </p:spPr>
+        <p:txBody>
+          <a:bodyPr wrap="square" lIns="0" tIns="0" rIns="0" bIns="0" rtlCol="0" anchor="ctr"/>
+          <a:lstStyle/>
+          <a:p>
+            <a:pPr algn="r" indent="0" marL="0">
+              <a:buNone/>
+            </a:pPr>
+            <a:r>
+              <a:rPr lang="en-US" sz="1400" b="1" dirty="0">
+                <a:solidFill>
+                  <a:srgbClr val="1C3F6E"/>
+                </a:solidFill>
+                <a:latin typeface="Calibri" pitchFamily="34" charset="0"/>
+                <a:ea typeface="Calibri" pitchFamily="34" charset="-122"/>
+                <a:cs typeface="Calibri" pitchFamily="34" charset="-120"/>
+              </a:rPr>
               <a:t>BILINGUAL GAME</a:t>
             </a:r>
             <a:endParaRPr lang="en-US" sz="1400" dirty="0"/>
@@ -16309,7 +16771,7 @@
       </p:sp>
       <p:graphicFrame>
         <p:nvGraphicFramePr>
-          <p:cNvPr id="47" name="Table 0"/>
+          <p:cNvPr id="48" name="Table 0"/>
           <p:cNvGraphicFramePr>
             <a:graphicFrameLocks noGrp="1"/>
           </p:cNvGraphicFramePr>
@@ -17345,7 +17807,7 @@
             <a:pPr algn="ctr"/>
             <a:fld id="{F7021451-1387-4CA6-816F-3879F97B5CBC}" type="slidenum">
               <a:rPr b="1" lang="en-US"/>
-              <a:t>46</a:t>
+              <a:t>47</a:t>
             </a:fld>
             <a:endParaRPr lang="en-US"/>
           </a:p>
@@ -17359,9 +17821,9 @@
 </p:sld>
 </file>
 
-<file path=ppt/slides/slide47.xml><?xml version="1.0" encoding="utf-8"?>
+<file path=ppt/slides/slide48.xml><?xml version="1.0" encoding="utf-8"?>
 <p:sld xmlns:a="http://schemas.openxmlformats.org/drawingml/2006/main" xmlns:r="http://schemas.openxmlformats.org/officeDocument/2006/relationships" xmlns:p="http://schemas.openxmlformats.org/presentationml/2006/main">
-  <p:cSld name="Slide 47">
+  <p:cSld name="Slide 48">
     <p:spTree>
       <p:nvGrpSpPr>
         <p:cNvPr id="1" name=""/>
@@ -17456,7 +17918,7 @@
       </p:sp>
       <p:graphicFrame>
         <p:nvGraphicFramePr>
-          <p:cNvPr id="48" name="Table 0"/>
+          <p:cNvPr id="49" name="Table 0"/>
           <p:cNvGraphicFramePr>
             <a:graphicFrameLocks noGrp="1"/>
           </p:cNvGraphicFramePr>
@@ -18078,7 +18540,7 @@
             <a:pPr algn="ctr"/>
             <a:fld id="{F7021451-1387-4CA6-816F-3879F97B5CBC}" type="slidenum">
               <a:rPr b="1" lang="en-US"/>
-              <a:t>47</a:t>
+              <a:t>48</a:t>
             </a:fld>
             <a:endParaRPr lang="en-US"/>
           </a:p>
@@ -18092,9 +18554,9 @@
 </p:sld>
 </file>
 
-<file path=ppt/slides/slide48.xml><?xml version="1.0" encoding="utf-8"?>
+<file path=ppt/slides/slide49.xml><?xml version="1.0" encoding="utf-8"?>
 <p:sld xmlns:a="http://schemas.openxmlformats.org/drawingml/2006/main" xmlns:r="http://schemas.openxmlformats.org/officeDocument/2006/relationships" xmlns:p="http://schemas.openxmlformats.org/presentationml/2006/main">
-  <p:cSld name="Slide 48">
+  <p:cSld name="Slide 49">
     <p:spTree>
       <p:nvGrpSpPr>
         <p:cNvPr id="1" name=""/>
@@ -18189,7 +18651,7 @@
       </p:sp>
       <p:graphicFrame>
         <p:nvGraphicFramePr>
-          <p:cNvPr id="49" name="Table 0"/>
+          <p:cNvPr id="50" name="Table 0"/>
           <p:cNvGraphicFramePr>
             <a:graphicFrameLocks noGrp="1"/>
           </p:cNvGraphicFramePr>
@@ -18299,7 +18761,7 @@
                           <a:ea typeface="Calibri" pitchFamily="34" charset="-122"/>
                           <a:cs typeface="Calibri" pitchFamily="34" charset="-120"/>
                         </a:rPr>
-                        <a:t>Reasons for Rapid Population Growth; Implications.</a:t>
+                        <a:t>Reasons for Rapid Population Growth; Negative Implications; Positive Implications.</a:t>
                       </a:r>
                       <a:endParaRPr lang="en-US" sz="1600" dirty="0">
                         <a:latin typeface="Calibri" charset="0"/>
@@ -18949,331 +19411,6 @@
             <a:pPr algn="ctr"/>
             <a:fld id="{F7021451-1387-4CA6-816F-3879F97B5CBC}" type="slidenum">
               <a:rPr b="1" lang="en-US"/>
-              <a:t>48</a:t>
-            </a:fld>
-            <a:endParaRPr lang="en-US"/>
-          </a:p>
-        </p:txBody>
-      </p:sp>
-    </p:spTree>
-  </p:cSld>
-  <p:clrMapOvr>
-    <a:masterClrMapping/>
-  </p:clrMapOvr>
-</p:sld>
-</file>
-
-<file path=ppt/slides/slide49.xml><?xml version="1.0" encoding="utf-8"?>
-<p:sld xmlns:a="http://schemas.openxmlformats.org/drawingml/2006/main" xmlns:r="http://schemas.openxmlformats.org/officeDocument/2006/relationships" xmlns:p="http://schemas.openxmlformats.org/presentationml/2006/main">
-  <p:cSld name="Slide 49">
-    <p:spTree>
-      <p:nvGrpSpPr>
-        <p:cNvPr id="1" name=""/>
-        <p:cNvGrpSpPr/>
-        <p:nvPr/>
-      </p:nvGrpSpPr>
-      <p:grpSpPr>
-        <a:xfrm>
-          <a:off x="0" y="0"/>
-          <a:ext cx="0" cy="0"/>
-          <a:chOff x="0" y="0"/>
-          <a:chExt cx="0" cy="0"/>
-        </a:xfrm>
-      </p:grpSpPr>
-      <p:sp>
-        <p:nvSpPr>
-          <p:cNvPr id="2" name="Text 0"/>
-          <p:cNvSpPr/>
-          <p:nvPr/>
-        </p:nvSpPr>
-        <p:spPr>
-          <a:xfrm>
-            <a:off x="457200" y="713232"/>
-            <a:ext cx="11368735" cy="274320"/>
-          </a:xfrm>
-          <a:prstGeom prst="rect">
-            <a:avLst/>
-          </a:prstGeom>
-          <a:noFill/>
-          <a:ln/>
-        </p:spPr>
-        <p:txBody>
-          <a:bodyPr wrap="square" lIns="0" tIns="0" rIns="0" bIns="0" rtlCol="0" anchor="ctr"/>
-          <a:lstStyle/>
-          <a:p>
-            <a:pPr algn="r" indent="0" marL="0">
-              <a:buNone/>
-            </a:pPr>
-            <a:r>
-              <a:rPr lang="en-US" sz="1400" b="1" dirty="0">
-                <a:solidFill>
-                  <a:srgbClr val="1C3F6E"/>
-                </a:solidFill>
-                <a:latin typeface="Calibri" pitchFamily="34" charset="0"/>
-                <a:ea typeface="Calibri" pitchFamily="34" charset="-122"/>
-                <a:cs typeface="Calibri" pitchFamily="34" charset="-120"/>
-              </a:rPr>
-              <a:t>TEACHER'S NOTE</a:t>
-            </a:r>
-            <a:endParaRPr lang="en-US" sz="1400" dirty="0"/>
-          </a:p>
-        </p:txBody>
-      </p:sp>
-      <p:pic>
-        <p:nvPicPr>
-          <p:cNvPr id="3" name="Image 0" descr="/home/claude/f4/img/minesec_sheet.png">    </p:cNvPr>
-          <p:cNvPicPr>
-            <a:picLocks noChangeAspect="1"/>
-          </p:cNvPicPr>
-          <p:nvPr/>
-        </p:nvPicPr>
-        <p:blipFill>
-          <a:blip r:embed="rId1"/>
-          <a:stretch>
-            <a:fillRect/>
-          </a:stretch>
-        </p:blipFill>
-        <p:spPr>
-          <a:xfrm>
-            <a:off x="0" y="658368"/>
-            <a:ext cx="5120640" cy="5833872"/>
-          </a:xfrm>
-          <a:prstGeom prst="rect">
-            <a:avLst/>
-          </a:prstGeom>
-        </p:spPr>
-      </p:pic>
-      <p:sp>
-        <p:nvSpPr>
-          <p:cNvPr id="4" name="Text 1"/>
-          <p:cNvSpPr/>
-          <p:nvPr/>
-        </p:nvSpPr>
-        <p:spPr>
-          <a:xfrm>
-            <a:off x="5349240" y="1005840"/>
-            <a:ext cx="6522415" cy="731520"/>
-          </a:xfrm>
-          <a:prstGeom prst="rect">
-            <a:avLst/>
-          </a:prstGeom>
-          <a:noFill/>
-          <a:ln/>
-        </p:spPr>
-        <p:txBody>
-          <a:bodyPr wrap="square" lIns="0" tIns="0" rIns="0" bIns="0" rtlCol="0" anchor="ctr">
-            <a:normAutofit/>
-          </a:bodyPr>
-          <a:lstStyle/>
-          <a:p>
-            <a:pPr algn="ctr" indent="0" marL="0">
-              <a:buNone/>
-            </a:pPr>
-            <a:r>
-              <a:rPr lang="en-US" sz="3600" b="1" dirty="0">
-                <a:solidFill>
-                  <a:srgbClr val="990011"/>
-                </a:solidFill>
-                <a:latin typeface="Times New Roman" pitchFamily="34" charset="0"/>
-                <a:ea typeface="Times New Roman" pitchFamily="34" charset="-122"/>
-                <a:cs typeface="Times New Roman" pitchFamily="34" charset="-120"/>
-              </a:rPr>
-              <a:t>Teacher's Note</a:t>
-            </a:r>
-            <a:endParaRPr lang="en-US" sz="3600" dirty="0"/>
-          </a:p>
-        </p:txBody>
-      </p:sp>
-      <p:sp>
-        <p:nvSpPr>
-          <p:cNvPr id="5" name="Text 2"/>
-          <p:cNvSpPr/>
-          <p:nvPr/>
-        </p:nvSpPr>
-        <p:spPr>
-          <a:xfrm>
-            <a:off x="5349240" y="1783080"/>
-            <a:ext cx="6522415" cy="4663440"/>
-          </a:xfrm>
-          <a:prstGeom prst="rect">
-            <a:avLst/>
-          </a:prstGeom>
-          <a:noFill/>
-          <a:ln/>
-        </p:spPr>
-        <p:txBody>
-          <a:bodyPr wrap="square" lIns="0" tIns="0" rIns="0" bIns="0" rtlCol="0" anchor="t"/>
-          <a:lstStyle/>
-          <a:p>
-            <a:pPr algn="l" marL="342900" indent="-342900">
-              <a:spcAft>
-                <a:spcPts val="800"/>
-              </a:spcAft>
-              <a:buSzPct val="100000"/>
-              <a:buChar char="•"/>
-            </a:pPr>
-            <a:r>
-              <a:rPr lang="en-US" sz="2000" dirty="0">
-                <a:solidFill>
-                  <a:srgbClr val="111111"/>
-                </a:solidFill>
-                <a:latin typeface="Calibri" pitchFamily="34" charset="0"/>
-                <a:ea typeface="Calibri" pitchFamily="34" charset="-122"/>
-                <a:cs typeface="Calibri" pitchFamily="34" charset="-120"/>
-              </a:rPr>
-              <a:t>Timing: Homework correction, plan, objectives 8 min | Recall, situation, action 10 min | 5 activities 30 min | Board summary (copying) 30 min | Evaluation, remediation 10 min | Homework, next lesson 5 min | Logbook 7 min</a:t>
-            </a:r>
-            <a:endParaRPr lang="en-US" sz="2000" dirty="0"/>
-          </a:p>
-          <a:p>
-            <a:pPr algn="l" marL="342900" indent="-342900">
-              <a:spcAft>
-                <a:spcPts val="800"/>
-              </a:spcAft>
-              <a:buSzPct val="100000"/>
-              <a:buChar char="•"/>
-            </a:pPr>
-            <a:r>
-              <a:rPr lang="en-US" sz="2000" dirty="0">
-                <a:solidFill>
-                  <a:srgbClr val="111111"/>
-                </a:solidFill>
-                <a:latin typeface="Calibri" pitchFamily="34" charset="0"/>
-                <a:ea typeface="Calibri" pitchFamily="34" charset="-122"/>
-                <a:cs typeface="Calibri" pitchFamily="34" charset="-120"/>
-              </a:rPr>
-              <a:t>Without the projector (Activity 1): discuss.</a:t>
-            </a:r>
-            <a:endParaRPr lang="en-US" sz="2000" dirty="0"/>
-          </a:p>
-          <a:p>
-            <a:pPr algn="l" marL="342900" indent="-342900">
-              <a:spcAft>
-                <a:spcPts val="800"/>
-              </a:spcAft>
-              <a:buSzPct val="100000"/>
-              <a:buChar char="•"/>
-            </a:pPr>
-            <a:r>
-              <a:rPr lang="en-US" sz="2000" dirty="0">
-                <a:solidFill>
-                  <a:srgbClr val="111111"/>
-                </a:solidFill>
-                <a:latin typeface="Calibri" pitchFamily="34" charset="0"/>
-                <a:ea typeface="Calibri" pitchFamily="34" charset="-122"/>
-                <a:cs typeface="Calibri" pitchFamily="34" charset="-120"/>
-              </a:rPr>
-              <a:t>Without the projector (Activity 2): discuss.</a:t>
-            </a:r>
-            <a:endParaRPr lang="en-US" sz="2000" dirty="0"/>
-          </a:p>
-          <a:p>
-            <a:pPr algn="l" marL="342900" indent="-342900">
-              <a:spcAft>
-                <a:spcPts val="800"/>
-              </a:spcAft>
-              <a:buSzPct val="100000"/>
-              <a:buChar char="•"/>
-            </a:pPr>
-            <a:r>
-              <a:rPr lang="en-US" sz="2000" dirty="0">
-                <a:solidFill>
-                  <a:srgbClr val="111111"/>
-                </a:solidFill>
-                <a:latin typeface="Calibri" pitchFamily="34" charset="0"/>
-                <a:ea typeface="Calibri" pitchFamily="34" charset="-122"/>
-                <a:cs typeface="Calibri" pitchFamily="34" charset="-120"/>
-              </a:rPr>
-              <a:t>Without the projector (Activity 3): discuss.</a:t>
-            </a:r>
-            <a:endParaRPr lang="en-US" sz="2000" dirty="0"/>
-          </a:p>
-          <a:p>
-            <a:pPr algn="l" marL="342900" indent="-342900">
-              <a:spcAft>
-                <a:spcPts val="800"/>
-              </a:spcAft>
-              <a:buSzPct val="100000"/>
-              <a:buChar char="•"/>
-            </a:pPr>
-            <a:r>
-              <a:rPr lang="en-US" sz="2000" dirty="0">
-                <a:solidFill>
-                  <a:srgbClr val="111111"/>
-                </a:solidFill>
-                <a:latin typeface="Calibri" pitchFamily="34" charset="0"/>
-                <a:ea typeface="Calibri" pitchFamily="34" charset="-122"/>
-                <a:cs typeface="Calibri" pitchFamily="34" charset="-120"/>
-              </a:rPr>
-              <a:t>Without the projector (Activity 4): discuss.</a:t>
-            </a:r>
-            <a:endParaRPr lang="en-US" sz="2000" dirty="0"/>
-          </a:p>
-          <a:p>
-            <a:pPr algn="l" marL="342900" indent="-342900">
-              <a:spcAft>
-                <a:spcPts val="800"/>
-              </a:spcAft>
-              <a:buSzPct val="100000"/>
-              <a:buChar char="•"/>
-            </a:pPr>
-            <a:r>
-              <a:rPr lang="en-US" sz="2000" dirty="0">
-                <a:solidFill>
-                  <a:srgbClr val="111111"/>
-                </a:solidFill>
-                <a:latin typeface="Calibri" pitchFamily="34" charset="0"/>
-                <a:ea typeface="Calibri" pitchFamily="34" charset="-122"/>
-                <a:cs typeface="Calibri" pitchFamily="34" charset="-120"/>
-              </a:rPr>
-              <a:t>Without the projector (Activity 5): discuss.</a:t>
-            </a:r>
-            <a:endParaRPr lang="en-US" sz="2000" dirty="0"/>
-          </a:p>
-        </p:txBody>
-      </p:sp>
-      <p:sp>
-        <p:nvSpPr>
-          <p:cNvPr id="25" name="Slide Number Placeholder 0"/>
-          <p:cNvSpPr>
-            <a:spLocks noGrp="1"/>
-          </p:cNvSpPr>
-          <p:nvPr>
-            <p:ph type="sldNum" sz="quarter" idx="4294967295"/>
-          </p:nvPr>
-        </p:nvSpPr>
-        <p:spPr>
-          <a:xfrm>
-            <a:off x="27432" y="91440"/>
-            <a:ext cx="585216" cy="475488"/>
-          </a:xfrm>
-          <a:prstGeom prst="rect">
-            <a:avLst/>
-          </a:prstGeom>
-          <a:extLst>
-            <a:ext uri="{C572A759-6A51-4108-AA02-DFA0A04FC94B}">
-              <ma14:wrappingTextBoxFlag xmlns:ma14="http://schemas.microsoft.com/office/mac/drawingml/2011/main" val="0"/>
-            </a:ext>
-          </a:extLst>
-        </p:spPr>
-        <p:txBody>
-          <a:bodyPr/>
-          <a:lstStyle>
-            <a:lvl1pPr>
-              <a:defRPr sz="2000">
-                <a:solidFill>
-                  <a:srgbClr val="FFFFFF"/>
-                </a:solidFill>
-                <a:latin typeface="Calibri"/>
-                <a:ea typeface="Calibri"/>
-                <a:cs typeface="Calibri"/>
-              </a:defRPr>
-            </a:lvl1pPr>
-          </a:lstStyle>
-          <a:p>
-            <a:pPr algn="ctr"/>
-            <a:fld id="{F7021451-1387-4CA6-816F-3879F97B5CBC}" type="slidenum">
-              <a:rPr b="1" lang="en-US"/>
               <a:t>49</a:t>
             </a:fld>
             <a:endParaRPr lang="en-US"/>
@@ -19557,7 +19694,7 @@
                 <a:ea typeface="Calibri" pitchFamily="34" charset="-122"/>
                 <a:cs typeface="Calibri" pitchFamily="34" charset="-120"/>
               </a:rPr>
-              <a:t>REFERENCES</a:t>
+              <a:t>TEACHER'S NOTE</a:t>
             </a:r>
             <a:endParaRPr lang="en-US" sz="1400" dirty="0"/>
           </a:p>
@@ -19580,7 +19717,7 @@
         <p:spPr>
           <a:xfrm>
             <a:off x="0" y="658368"/>
-            <a:ext cx="2468880" cy="5833872"/>
+            <a:ext cx="5120640" cy="5833872"/>
           </a:xfrm>
           <a:prstGeom prst="rect">
             <a:avLst/>
@@ -19595,8 +19732,8 @@
         </p:nvSpPr>
         <p:spPr>
           <a:xfrm>
-            <a:off x="2697480" y="1005840"/>
-            <a:ext cx="9174175" cy="731520"/>
+            <a:off x="5349240" y="1005840"/>
+            <a:ext cx="6522415" cy="731520"/>
           </a:xfrm>
           <a:prstGeom prst="rect">
             <a:avLst/>
@@ -19622,7 +19759,7 @@
                 <a:ea typeface="Times New Roman" pitchFamily="34" charset="-122"/>
                 <a:cs typeface="Times New Roman" pitchFamily="34" charset="-120"/>
               </a:rPr>
-              <a:t>References</a:t>
+              <a:t>Teacher's Note</a:t>
             </a:r>
             <a:endParaRPr lang="en-US" sz="3600" dirty="0"/>
           </a:p>
@@ -19636,8 +19773,8 @@
         </p:nvSpPr>
         <p:spPr>
           <a:xfrm>
-            <a:off x="2697480" y="1783080"/>
-            <a:ext cx="9174175" cy="4663440"/>
+            <a:off x="5349240" y="1783080"/>
+            <a:ext cx="6522415" cy="4663440"/>
           </a:xfrm>
           <a:prstGeom prst="rect">
             <a:avLst/>
@@ -19657,7 +19794,7 @@
               <a:buChar char="•"/>
             </a:pPr>
             <a:r>
-              <a:rPr lang="en-US" sz="1800" dirty="0">
+              <a:rPr lang="en-US" sz="2000" dirty="0">
                 <a:solidFill>
                   <a:srgbClr val="111111"/>
                 </a:solidFill>
@@ -19665,9 +19802,9 @@
                 <a:ea typeface="Calibri" pitchFamily="34" charset="-122"/>
                 <a:cs typeface="Calibri" pitchFamily="34" charset="-120"/>
               </a:rPr>
-              <a:t>Geography Syllabus, Forms I–V, MINESEC (2023) — Form 5, Module III: Management of Population Growth and Space Colonisation.</a:t>
-            </a:r>
-            <a:endParaRPr lang="en-US" sz="1800" dirty="0"/>
+              <a:t>Timing: Homework correction, plan, objectives 8 min | Recall, situation, action 10 min | 5 activities 30 min | Board summary (copying) 30 min | Evaluation, remediation 10 min | Homework, next lesson 5 min | Logbook 7 min</a:t>
+            </a:r>
+            <a:endParaRPr lang="en-US" sz="2000" dirty="0"/>
           </a:p>
           <a:p>
             <a:pPr algn="l" marL="342900" indent="-342900">
@@ -19678,7 +19815,7 @@
               <a:buChar char="•"/>
             </a:pPr>
             <a:r>
-              <a:rPr lang="en-US" sz="1800" dirty="0">
+              <a:rPr lang="en-US" sz="2000" dirty="0">
                 <a:solidFill>
                   <a:srgbClr val="111111"/>
                 </a:solidFill>
@@ -19686,9 +19823,9 @@
                 <a:ea typeface="Calibri" pitchFamily="34" charset="-122"/>
                 <a:cs typeface="Calibri" pitchFamily="34" charset="-120"/>
               </a:rPr>
-              <a:t>Photo, Activity 1: “African school children” by World Resources, CC BY-NC-SA 2.0, via Flickr (https://www.flickr.com/photos/26107309@N05/2658469563)</a:t>
-            </a:r>
-            <a:endParaRPr lang="en-US" sz="1800" dirty="0"/>
+              <a:t>Without the projector (Activity 1): discuss.</a:t>
+            </a:r>
+            <a:endParaRPr lang="en-US" sz="2000" dirty="0"/>
           </a:p>
           <a:p>
             <a:pPr algn="l" marL="342900" indent="-342900">
@@ -19699,7 +19836,7 @@
               <a:buChar char="•"/>
             </a:pPr>
             <a:r>
-              <a:rPr lang="en-US" sz="1800" dirty="0">
+              <a:rPr lang="en-US" sz="2000" dirty="0">
                 <a:solidFill>
                   <a:srgbClr val="111111"/>
                 </a:solidFill>
@@ -19707,9 +19844,9 @@
                 <a:ea typeface="Calibri" pitchFamily="34" charset="-122"/>
                 <a:cs typeface="Calibri" pitchFamily="34" charset="-120"/>
               </a:rPr>
-              <a:t>Photo, Activity 2: “Waiting at the dispensary” by World Bank Photo Collection, CC BY-NC-ND 2.0, via Flickr (https://www.flickr.com/photos/10816734@N03/7556643920)</a:t>
-            </a:r>
-            <a:endParaRPr lang="en-US" sz="1800" dirty="0"/>
+              <a:t>Without the projector (Activity 2): discuss.</a:t>
+            </a:r>
+            <a:endParaRPr lang="en-US" sz="2000" dirty="0"/>
           </a:p>
           <a:p>
             <a:pPr algn="l" marL="342900" indent="-342900">
@@ -19720,7 +19857,7 @@
               <a:buChar char="•"/>
             </a:pPr>
             <a:r>
-              <a:rPr lang="en-US" sz="1800" dirty="0">
+              <a:rPr lang="en-US" sz="2000" dirty="0">
                 <a:solidFill>
                   <a:srgbClr val="111111"/>
                 </a:solidFill>
@@ -19728,9 +19865,9 @@
                 <a:ea typeface="Calibri" pitchFamily="34" charset="-122"/>
                 <a:cs typeface="Calibri" pitchFamily="34" charset="-120"/>
               </a:rPr>
-              <a:t>Photo, Activity 3: “Students in Primary Seven at Zanaki Primary School” by World Bank Photo Collection, CC BY-NC-ND 2.0, via Flickr (https://www.flickr.com/photos/10816734@N03/33423887921)</a:t>
-            </a:r>
-            <a:endParaRPr lang="en-US" sz="1800" dirty="0"/>
+              <a:t>Without the projector (Activity 3): discuss.</a:t>
+            </a:r>
+            <a:endParaRPr lang="en-US" sz="2000" dirty="0"/>
           </a:p>
           <a:p>
             <a:pPr algn="l" marL="342900" indent="-342900">
@@ -19741,7 +19878,7 @@
               <a:buChar char="•"/>
             </a:pPr>
             <a:r>
-              <a:rPr lang="en-US" sz="1800" dirty="0">
+              <a:rPr lang="en-US" sz="2000" dirty="0">
                 <a:solidFill>
                   <a:srgbClr val="111111"/>
                 </a:solidFill>
@@ -19749,9 +19886,9 @@
                 <a:ea typeface="Calibri" pitchFamily="34" charset="-122"/>
                 <a:cs typeface="Calibri" pitchFamily="34" charset="-120"/>
               </a:rPr>
-              <a:t>Photo, Activity 4: “Mathare” by Book Aid International, CC BY-NC-ND 2.0, via Flickr (https://www.flickr.com/photos/45024905@N07/4135561707)</a:t>
-            </a:r>
-            <a:endParaRPr lang="en-US" sz="1800" dirty="0"/>
+              <a:t>Without the projector (Activity 4): discuss.</a:t>
+            </a:r>
+            <a:endParaRPr lang="en-US" sz="2000" dirty="0"/>
           </a:p>
           <a:p>
             <a:pPr algn="l" marL="342900" indent="-342900">
@@ -19762,7 +19899,7 @@
               <a:buChar char="•"/>
             </a:pPr>
             <a:r>
-              <a:rPr lang="en-US" sz="1800" dirty="0">
+              <a:rPr lang="en-US" sz="2000" dirty="0">
                 <a:solidFill>
                   <a:srgbClr val="111111"/>
                 </a:solidFill>
@@ -19770,10 +19907,209 @@
                 <a:ea typeface="Calibri" pitchFamily="34" charset="-122"/>
                 <a:cs typeface="Calibri" pitchFamily="34" charset="-120"/>
               </a:rPr>
-              <a:t>Photo, Activity 5: “Managed Destruction” by Harlz_, CC BY-NC 2.0, via Flickr (https://www.flickr.com/photos/35169553@N06/4295797661)</a:t>
-            </a:r>
-            <a:endParaRPr lang="en-US" sz="1800" dirty="0"/>
-          </a:p>
+              <a:t>Without the projector (Activity 5): discuss.</a:t>
+            </a:r>
+            <a:endParaRPr lang="en-US" sz="2000" dirty="0"/>
+          </a:p>
+        </p:txBody>
+      </p:sp>
+      <p:sp>
+        <p:nvSpPr>
+          <p:cNvPr id="25" name="Slide Number Placeholder 0"/>
+          <p:cNvSpPr>
+            <a:spLocks noGrp="1"/>
+          </p:cNvSpPr>
+          <p:nvPr>
+            <p:ph type="sldNum" sz="quarter" idx="4294967295"/>
+          </p:nvPr>
+        </p:nvSpPr>
+        <p:spPr>
+          <a:xfrm>
+            <a:off x="27432" y="91440"/>
+            <a:ext cx="585216" cy="475488"/>
+          </a:xfrm>
+          <a:prstGeom prst="rect">
+            <a:avLst/>
+          </a:prstGeom>
+          <a:extLst>
+            <a:ext uri="{C572A759-6A51-4108-AA02-DFA0A04FC94B}">
+              <ma14:wrappingTextBoxFlag xmlns:ma14="http://schemas.microsoft.com/office/mac/drawingml/2011/main" val="0"/>
+            </a:ext>
+          </a:extLst>
+        </p:spPr>
+        <p:txBody>
+          <a:bodyPr/>
+          <a:lstStyle>
+            <a:lvl1pPr>
+              <a:defRPr sz="2000">
+                <a:solidFill>
+                  <a:srgbClr val="FFFFFF"/>
+                </a:solidFill>
+                <a:latin typeface="Calibri"/>
+                <a:ea typeface="Calibri"/>
+                <a:cs typeface="Calibri"/>
+              </a:defRPr>
+            </a:lvl1pPr>
+          </a:lstStyle>
+          <a:p>
+            <a:pPr algn="ctr"/>
+            <a:fld id="{F7021451-1387-4CA6-816F-3879F97B5CBC}" type="slidenum">
+              <a:rPr b="1" lang="en-US"/>
+              <a:t>50</a:t>
+            </a:fld>
+            <a:endParaRPr lang="en-US"/>
+          </a:p>
+        </p:txBody>
+      </p:sp>
+    </p:spTree>
+  </p:cSld>
+  <p:clrMapOvr>
+    <a:masterClrMapping/>
+  </p:clrMapOvr>
+</p:sld>
+</file>
+
+<file path=ppt/slides/slide51.xml><?xml version="1.0" encoding="utf-8"?>
+<p:sld xmlns:a="http://schemas.openxmlformats.org/drawingml/2006/main" xmlns:r="http://schemas.openxmlformats.org/officeDocument/2006/relationships" xmlns:p="http://schemas.openxmlformats.org/presentationml/2006/main">
+  <p:cSld name="Slide 51">
+    <p:spTree>
+      <p:nvGrpSpPr>
+        <p:cNvPr id="1" name=""/>
+        <p:cNvGrpSpPr/>
+        <p:nvPr/>
+      </p:nvGrpSpPr>
+      <p:grpSpPr>
+        <a:xfrm>
+          <a:off x="0" y="0"/>
+          <a:ext cx="0" cy="0"/>
+          <a:chOff x="0" y="0"/>
+          <a:chExt cx="0" cy="0"/>
+        </a:xfrm>
+      </p:grpSpPr>
+      <p:sp>
+        <p:nvSpPr>
+          <p:cNvPr id="2" name="Text 0"/>
+          <p:cNvSpPr/>
+          <p:nvPr/>
+        </p:nvSpPr>
+        <p:spPr>
+          <a:xfrm>
+            <a:off x="457200" y="713232"/>
+            <a:ext cx="11368735" cy="274320"/>
+          </a:xfrm>
+          <a:prstGeom prst="rect">
+            <a:avLst/>
+          </a:prstGeom>
+          <a:noFill/>
+          <a:ln/>
+        </p:spPr>
+        <p:txBody>
+          <a:bodyPr wrap="square" lIns="0" tIns="0" rIns="0" bIns="0" rtlCol="0" anchor="ctr"/>
+          <a:lstStyle/>
+          <a:p>
+            <a:pPr algn="r" indent="0" marL="0">
+              <a:buNone/>
+            </a:pPr>
+            <a:r>
+              <a:rPr lang="en-US" sz="1400" b="1" dirty="0">
+                <a:solidFill>
+                  <a:srgbClr val="1C3F6E"/>
+                </a:solidFill>
+                <a:latin typeface="Calibri" pitchFamily="34" charset="0"/>
+                <a:ea typeface="Calibri" pitchFamily="34" charset="-122"/>
+                <a:cs typeface="Calibri" pitchFamily="34" charset="-120"/>
+              </a:rPr>
+              <a:t>REFERENCES</a:t>
+            </a:r>
+            <a:endParaRPr lang="en-US" sz="1400" dirty="0"/>
+          </a:p>
+        </p:txBody>
+      </p:sp>
+      <p:pic>
+        <p:nvPicPr>
+          <p:cNvPr id="3" name="Image 0" descr="/home/claude/f4/img/minesec_sheet.png">    </p:cNvPr>
+          <p:cNvPicPr>
+            <a:picLocks noChangeAspect="1"/>
+          </p:cNvPicPr>
+          <p:nvPr/>
+        </p:nvPicPr>
+        <p:blipFill>
+          <a:blip r:embed="rId1"/>
+          <a:stretch>
+            <a:fillRect/>
+          </a:stretch>
+        </p:blipFill>
+        <p:spPr>
+          <a:xfrm>
+            <a:off x="0" y="658368"/>
+            <a:ext cx="2468880" cy="5833872"/>
+          </a:xfrm>
+          <a:prstGeom prst="rect">
+            <a:avLst/>
+          </a:prstGeom>
+        </p:spPr>
+      </p:pic>
+      <p:sp>
+        <p:nvSpPr>
+          <p:cNvPr id="4" name="Text 1"/>
+          <p:cNvSpPr/>
+          <p:nvPr/>
+        </p:nvSpPr>
+        <p:spPr>
+          <a:xfrm>
+            <a:off x="2697480" y="1005840"/>
+            <a:ext cx="9174175" cy="731520"/>
+          </a:xfrm>
+          <a:prstGeom prst="rect">
+            <a:avLst/>
+          </a:prstGeom>
+          <a:noFill/>
+          <a:ln/>
+        </p:spPr>
+        <p:txBody>
+          <a:bodyPr wrap="square" lIns="0" tIns="0" rIns="0" bIns="0" rtlCol="0" anchor="ctr">
+            <a:normAutofit/>
+          </a:bodyPr>
+          <a:lstStyle/>
+          <a:p>
+            <a:pPr algn="ctr" indent="0" marL="0">
+              <a:buNone/>
+            </a:pPr>
+            <a:r>
+              <a:rPr lang="en-US" sz="3600" b="1" dirty="0">
+                <a:solidFill>
+                  <a:srgbClr val="990011"/>
+                </a:solidFill>
+                <a:latin typeface="Times New Roman" pitchFamily="34" charset="0"/>
+                <a:ea typeface="Times New Roman" pitchFamily="34" charset="-122"/>
+                <a:cs typeface="Times New Roman" pitchFamily="34" charset="-120"/>
+              </a:rPr>
+              <a:t>References</a:t>
+            </a:r>
+            <a:endParaRPr lang="en-US" sz="3600" dirty="0"/>
+          </a:p>
+        </p:txBody>
+      </p:sp>
+      <p:sp>
+        <p:nvSpPr>
+          <p:cNvPr id="5" name="Text 2"/>
+          <p:cNvSpPr/>
+          <p:nvPr/>
+        </p:nvSpPr>
+        <p:spPr>
+          <a:xfrm>
+            <a:off x="2697480" y="1783080"/>
+            <a:ext cx="9174175" cy="4663440"/>
+          </a:xfrm>
+          <a:prstGeom prst="rect">
+            <a:avLst/>
+          </a:prstGeom>
+          <a:noFill/>
+          <a:ln/>
+        </p:spPr>
+        <p:txBody>
+          <a:bodyPr wrap="square" lIns="0" tIns="0" rIns="0" bIns="0" rtlCol="0" anchor="t"/>
+          <a:lstStyle/>
           <a:p>
             <a:pPr algn="l" marL="342900" indent="-342900">
               <a:spcAft>
@@ -19791,6 +20127,132 @@
                 <a:ea typeface="Calibri" pitchFamily="34" charset="-122"/>
                 <a:cs typeface="Calibri" pitchFamily="34" charset="-120"/>
               </a:rPr>
+              <a:t>Geography Syllabus, Forms I–V, MINESEC (2023) — Form 5, Module III: Management of Population Growth and Space Colonisation.</a:t>
+            </a:r>
+            <a:endParaRPr lang="en-US" sz="1800" dirty="0"/>
+          </a:p>
+          <a:p>
+            <a:pPr algn="l" marL="342900" indent="-342900">
+              <a:spcAft>
+                <a:spcPts val="800"/>
+              </a:spcAft>
+              <a:buSzPct val="100000"/>
+              <a:buChar char="•"/>
+            </a:pPr>
+            <a:r>
+              <a:rPr lang="en-US" sz="1800" dirty="0">
+                <a:solidFill>
+                  <a:srgbClr val="111111"/>
+                </a:solidFill>
+                <a:latin typeface="Calibri" pitchFamily="34" charset="0"/>
+                <a:ea typeface="Calibri" pitchFamily="34" charset="-122"/>
+                <a:cs typeface="Calibri" pitchFamily="34" charset="-120"/>
+              </a:rPr>
+              <a:t>Photo, Activity 1: “African school children” by World Resources, CC BY-NC-SA 2.0, via Flickr (https://www.flickr.com/photos/26107309@N05/2658469563)</a:t>
+            </a:r>
+            <a:endParaRPr lang="en-US" sz="1800" dirty="0"/>
+          </a:p>
+          <a:p>
+            <a:pPr algn="l" marL="342900" indent="-342900">
+              <a:spcAft>
+                <a:spcPts val="800"/>
+              </a:spcAft>
+              <a:buSzPct val="100000"/>
+              <a:buChar char="•"/>
+            </a:pPr>
+            <a:r>
+              <a:rPr lang="en-US" sz="1800" dirty="0">
+                <a:solidFill>
+                  <a:srgbClr val="111111"/>
+                </a:solidFill>
+                <a:latin typeface="Calibri" pitchFamily="34" charset="0"/>
+                <a:ea typeface="Calibri" pitchFamily="34" charset="-122"/>
+                <a:cs typeface="Calibri" pitchFamily="34" charset="-120"/>
+              </a:rPr>
+              <a:t>Photo, Activity 2: “Waiting at the dispensary” by World Bank Photo Collection, CC BY-NC-ND 2.0, via Flickr (https://www.flickr.com/photos/10816734@N03/7556643920)</a:t>
+            </a:r>
+            <a:endParaRPr lang="en-US" sz="1800" dirty="0"/>
+          </a:p>
+          <a:p>
+            <a:pPr algn="l" marL="342900" indent="-342900">
+              <a:spcAft>
+                <a:spcPts val="800"/>
+              </a:spcAft>
+              <a:buSzPct val="100000"/>
+              <a:buChar char="•"/>
+            </a:pPr>
+            <a:r>
+              <a:rPr lang="en-US" sz="1800" dirty="0">
+                <a:solidFill>
+                  <a:srgbClr val="111111"/>
+                </a:solidFill>
+                <a:latin typeface="Calibri" pitchFamily="34" charset="0"/>
+                <a:ea typeface="Calibri" pitchFamily="34" charset="-122"/>
+                <a:cs typeface="Calibri" pitchFamily="34" charset="-120"/>
+              </a:rPr>
+              <a:t>Photo, Activity 3: “Students in Primary Seven at Zanaki Primary School” by World Bank Photo Collection, CC BY-NC-ND 2.0, via Flickr (https://www.flickr.com/photos/10816734@N03/33423887921)</a:t>
+            </a:r>
+            <a:endParaRPr lang="en-US" sz="1800" dirty="0"/>
+          </a:p>
+          <a:p>
+            <a:pPr algn="l" marL="342900" indent="-342900">
+              <a:spcAft>
+                <a:spcPts val="800"/>
+              </a:spcAft>
+              <a:buSzPct val="100000"/>
+              <a:buChar char="•"/>
+            </a:pPr>
+            <a:r>
+              <a:rPr lang="en-US" sz="1800" dirty="0">
+                <a:solidFill>
+                  <a:srgbClr val="111111"/>
+                </a:solidFill>
+                <a:latin typeface="Calibri" pitchFamily="34" charset="0"/>
+                <a:ea typeface="Calibri" pitchFamily="34" charset="-122"/>
+                <a:cs typeface="Calibri" pitchFamily="34" charset="-120"/>
+              </a:rPr>
+              <a:t>Photo, Activity 4: “Mathare” by Book Aid International, CC BY-NC-ND 2.0, via Flickr (https://www.flickr.com/photos/45024905@N07/4135561707)</a:t>
+            </a:r>
+            <a:endParaRPr lang="en-US" sz="1800" dirty="0"/>
+          </a:p>
+          <a:p>
+            <a:pPr algn="l" marL="342900" indent="-342900">
+              <a:spcAft>
+                <a:spcPts val="800"/>
+              </a:spcAft>
+              <a:buSzPct val="100000"/>
+              <a:buChar char="•"/>
+            </a:pPr>
+            <a:r>
+              <a:rPr lang="en-US" sz="1800" dirty="0">
+                <a:solidFill>
+                  <a:srgbClr val="111111"/>
+                </a:solidFill>
+                <a:latin typeface="Calibri" pitchFamily="34" charset="0"/>
+                <a:ea typeface="Calibri" pitchFamily="34" charset="-122"/>
+                <a:cs typeface="Calibri" pitchFamily="34" charset="-120"/>
+              </a:rPr>
+              <a:t>Photo, Activity 5: “Managed Destruction” by Harlz_, CC BY-NC 2.0, via Flickr (https://www.flickr.com/photos/35169553@N06/4295797661)</a:t>
+            </a:r>
+            <a:endParaRPr lang="en-US" sz="1800" dirty="0"/>
+          </a:p>
+          <a:p>
+            <a:pPr algn="l" marL="342900" indent="-342900">
+              <a:spcAft>
+                <a:spcPts val="800"/>
+              </a:spcAft>
+              <a:buSzPct val="100000"/>
+              <a:buChar char="•"/>
+            </a:pPr>
+            <a:r>
+              <a:rPr lang="en-US" sz="1800" dirty="0">
+                <a:solidFill>
+                  <a:srgbClr val="111111"/>
+                </a:solidFill>
+                <a:latin typeface="Calibri" pitchFamily="34" charset="0"/>
+                <a:ea typeface="Calibri" pitchFamily="34" charset="-122"/>
+                <a:cs typeface="Calibri" pitchFamily="34" charset="-120"/>
+              </a:rPr>
               <a:t>Diagrams and animations: drawn for this lesson (Geography Department).</a:t>
             </a:r>
             <a:endParaRPr lang="en-US" sz="1800" dirty="0"/>
@@ -19839,7 +20301,7 @@
             <a:pPr algn="ctr"/>
             <a:fld id="{F7021451-1387-4CA6-816F-3879F97B5CBC}" type="slidenum">
               <a:rPr b="1" lang="en-US"/>
-              <a:t>50</a:t>
+              <a:t>51</a:t>
             </a:fld>
             <a:endParaRPr lang="en-US"/>
           </a:p>
